--- a/disciplina-08-indicadores-socioeconomicos/materiais/02_Unidade_2_Indicadores_e_Diagnosticos.pptx
+++ b/disciplina-08-indicadores-socioeconomicos/materiais/02_Unidade_2_Indicadores_e_Diagnosticos.pptx
@@ -32,9 +32,10 @@
     <p:sldId id="280" r:id="rId26"/>
     <p:sldId id="281" r:id="rId27"/>
     <p:sldId id="282" r:id="rId28"/>
+    <p:sldId id="283" r:id="rId29"/>
   </p:sldIdLst>
   <p:notesMasterIdLst>
-    <p:notesMasterId r:id="rId29"/>
+    <p:notesMasterId r:id="rId30"/>
   </p:notesMasterIdLst>
   <p:sldSz cx="9144000" cy="5143500"/>
   <p:notesSz cx="5143500" cy="9144000"/>
@@ -1425,7 +1426,7 @@
           <a:p>
             <a:r>
               <a:rPr lang="en-US" dirty="0"/>
-              <a:t/>
+              <a:t>Olá, turma! Esta é a Unidade 2 de Indicadores Socioeconômicos na Gestão Pública: indicadores e diagnósticos socioeconômicos. Na unidade anterior, vimos o que é um indicador e como ele se calcula. Agora, vamos usá-los na prática: no ciclo das políticas públicas e na elaboração de um diagnóstico do município.</a:t>
             </a:r>
             <a:endParaRPr lang="en-US" dirty="0"/>
           </a:p>
@@ -1513,7 +1514,7 @@
           <a:p>
             <a:r>
               <a:rPr lang="en-US" dirty="0"/>
-              <a:t/>
+              <a:t>Um número isolado diz pouco. Para interpretar, é preciso comparar de três formas. No tempo, com a série histórica: a taxa melhorou ou piorou? No espaço: como o município está em relação ao estado, ao país e aos vizinhos? E com metas: qual a distância da meta do plano, da lei ou dos ODS? Veja o exemplo: uma taxa de desocupação de 8% parece moderada. Mas, se a do estado é 5% e a do município subiu de 4% para 8% em dois anos, o quadro é preocupante. Os dados são hipotéticos.</a:t>
             </a:r>
             <a:endParaRPr lang="en-US" dirty="0"/>
           </a:p>
@@ -1601,7 +1602,7 @@
           <a:p>
             <a:r>
               <a:rPr lang="en-US" dirty="0"/>
-              <a:t/>
+              <a:t>O gráfico mostra esse exemplo. [Apontar para as duas linhas.] Isolado, 8% parece pouco. Na série, porém, a taxa do município dobrou em dois anos. E, no espaço, passou de abaixo para acima da taxa do estado, que ficou estável em torno de 5%. A conclusão é que se trata de um problema que pede investigação e ação.</a:t>
             </a:r>
             <a:endParaRPr lang="en-US" dirty="0"/>
           </a:p>
@@ -1689,7 +1690,7 @@
           <a:p>
             <a:r>
               <a:rPr lang="en-US" dirty="0"/>
-              <a:t/>
+              <a:t>Quatro cuidados na leitura dos indicadores. Primeiro, números absolutos: cidades maiores sempre terão mais casos, por isso use taxas para comparar. Segundo, pequenos números: em municípios pequenos, um único caso muda muito a taxa; use médias de três anos. Terceiro, o denominador: uma população estimada ou desatualizada distorce as taxas. E quarto, a mudança de método: confira se a forma de cálculo mudou ao longo da série.</a:t>
             </a:r>
             <a:endParaRPr lang="en-US" dirty="0"/>
           </a:p>
@@ -1777,7 +1778,7 @@
           <a:p>
             <a:r>
               <a:rPr lang="en-US" dirty="0"/>
-              <a:t/>
+              <a:t>Outro cuidado é desagregar. [Apontar para as barras.] Neste município hipotético, a taxa de analfabetismo total é de 8%. Mas ela esconde duas realidades: na zona urbana, 5,5%; na zona rural, 17%, três vezes mais. Entre os jovens de 15 a 39 anos, 2,5%; entre as pessoas de 60 anos ou mais, 24%, quase uma em cada quatro. A política deve mirar esses grupos, por exemplo com a educação de jovens e adultos no campo.</a:t>
             </a:r>
             <a:endParaRPr lang="en-US" dirty="0"/>
           </a:p>
@@ -1865,7 +1866,7 @@
           <a:p>
             <a:r>
               <a:rPr lang="en-US" dirty="0"/>
-              <a:t/>
+              <a:t>Vamos a um diagnóstico em Mato Grosso. A secretaria de educação de um município precisa decidir onde abrir novas vagas de creche e como melhorar a alfabetização. A tabela mostra os indicadores, as fontes e o uso de cada um: a taxa de atendimento em creche, com dados do Censo Escolar e do IBGE, mostra onde falta vaga; o IDEB dos anos iniciais, do INEP, mostra a qualidade do ensino; a distorção idade-série, também do INEP, indica o risco de evasão; e as crianças em famílias do CadÚnico, do MDS, ajudam a priorizar os mais pobres.</a:t>
             </a:r>
             <a:endParaRPr lang="en-US" dirty="0"/>
           </a:p>
@@ -1953,7 +1954,7 @@
           <a:p>
             <a:r>
               <a:rPr lang="en-US" dirty="0"/>
-              <a:t/>
+              <a:t>O gráfico mostra o atendimento em creche por região desse município hipotético. [Apontar para as barras.] A meta 1 do Plano Nacional de Educação é atender pelo menos 50% das crianças de 0 a 3 anos. Só o Centro alcança a meta, com 58%. A região Leste, com 22%, e a zona rural, com 12%, concentram a maior falta de vagas. Cruzar esses dados com o CadÚnico ajuda a priorizar as famílias mais pobres.</a:t>
             </a:r>
             <a:endParaRPr lang="en-US" dirty="0"/>
           </a:p>
@@ -2041,7 +2042,7 @@
           <a:p>
             <a:r>
               <a:rPr lang="en-US" dirty="0"/>
-              <a:t/>
+              <a:t>Vamos às atividades da Unidade 2, com as datas no SIGAA. Nesta semana, assista a esta videoaula e faça a leitura. Depois, faça os Exercícios de fixação 1, que não valem nota, mas são um ótimo treino, e a Avaliação A1: um questionário no SIGAA sobre as Unidades 1 e 2, até as 23h55. Na próxima unidade, os produtores de dados e as principais fontes do país.</a:t>
             </a:r>
             <a:endParaRPr lang="en-US" dirty="0"/>
           </a:p>
@@ -2129,7 +2130,7 @@
           <a:p>
             <a:r>
               <a:rPr lang="en-US" dirty="0"/>
-              <a:t/>
+              <a:t>Hora do quiz da Unidade 2: cinco perguntas. Pause o vídeo a cada pergunta, responda e confira no slide seguinte. É um bom aquecimento para a A1.</a:t>
             </a:r>
             <a:endParaRPr lang="en-US" dirty="0"/>
           </a:p>
@@ -2217,7 +2218,7 @@
           <a:p>
             <a:r>
               <a:rPr lang="en-US" dirty="0"/>
-              <a:t/>
+              <a:t>Pergunta 1. Na fase de diagnóstico, os indicadores servem para: Letra a: Medir o impacto final. Letra b: Identificar problemas, sua dimensão e quem é afetado. Letra c: Pagar fornecedores. Letra d: Substituir o orçamento. Pause o vídeo e escolha a sua resposta.</a:t>
             </a:r>
             <a:endParaRPr lang="en-US" dirty="0"/>
           </a:p>
@@ -2305,7 +2306,7 @@
           <a:p>
             <a:r>
               <a:rPr lang="en-US" dirty="0"/>
-              <a:t/>
+              <a:t>A resposta correta é a letra b: Identificar problemas, sua dimensão e quem é afetado. O diagnóstico revela a situação e a distribuição dos problemas e orienta as prioridades.</a:t>
             </a:r>
             <a:endParaRPr lang="en-US" dirty="0"/>
           </a:p>
@@ -2393,7 +2394,7 @@
           <a:p>
             <a:r>
               <a:rPr lang="en-US" dirty="0"/>
-              <a:t/>
+              <a:t>Esta é a segunda semana da disciplina, com as datas no SIGAA. A leitura é o livro de Jannuzzi, nas partes sobre indicadores e diagnósticos, junto com os tópicos 3 e 4 do sumário da página de conteúdos. Nesta semana, você faz os Exercícios de fixação 1 e a Avaliação A1, no SIGAA.</a:t>
             </a:r>
             <a:endParaRPr lang="en-US" dirty="0"/>
           </a:p>
@@ -2481,7 +2482,7 @@
           <a:p>
             <a:r>
               <a:rPr lang="en-US" dirty="0"/>
-              <a:t/>
+              <a:t>Pergunta 2. Atingir 95% da meta de cobertura vacinal expressa a: Letra a: Eficiência. Letra b: Efetividade. Letra c: Eficácia. Letra d: Economicidade. Pause o vídeo e escolha a sua resposta.</a:t>
             </a:r>
             <a:endParaRPr lang="en-US" dirty="0"/>
           </a:p>
@@ -2569,7 +2570,7 @@
           <a:p>
             <a:r>
               <a:rPr lang="en-US" dirty="0"/>
-              <a:t/>
+              <a:t>A resposta correta é a letra c: Eficácia. Eficácia é o grau de alcance das metas.</a:t>
             </a:r>
             <a:endParaRPr lang="en-US" dirty="0"/>
           </a:p>
@@ -2657,7 +2658,7 @@
           <a:p>
             <a:r>
               <a:rPr lang="en-US" dirty="0"/>
-              <a:t/>
+              <a:t>Pergunta 3. A queda das internações por doenças evitáveis após a vacinação expressa a: Letra a: Efetividade. Letra b: Eficiência. Letra c: Eficácia. Letra d: Economicidade. Pause o vídeo e escolha a sua resposta.</a:t>
             </a:r>
             <a:endParaRPr lang="en-US" dirty="0"/>
           </a:p>
@@ -2745,7 +2746,7 @@
           <a:p>
             <a:r>
               <a:rPr lang="en-US" dirty="0"/>
-              <a:t/>
+              <a:t>A resposta correta é a letra a: Efetividade. Efetividade mede a mudança nas condições de vida: o impacto.</a:t>
             </a:r>
             <a:endParaRPr lang="en-US" dirty="0"/>
           </a:p>
@@ -2833,7 +2834,7 @@
           <a:p>
             <a:r>
               <a:rPr lang="en-US" dirty="0"/>
-              <a:t/>
+              <a:t>Pergunta 4. Comparar o município com o estado e o país é uma comparação: Letra a: No tempo. Letra b: Com metas. Letra c: Subjetiva. Letra d: No espaço. Pause o vídeo e escolha a sua resposta.</a:t>
             </a:r>
             <a:endParaRPr lang="en-US" dirty="0"/>
           </a:p>
@@ -2921,7 +2922,7 @@
           <a:p>
             <a:r>
               <a:rPr lang="en-US" dirty="0"/>
-              <a:t/>
+              <a:t>A resposta correta é a letra d: No espaço. Comparações territoriais situam o município em seu contexto.</a:t>
             </a:r>
             <a:endParaRPr lang="en-US" dirty="0"/>
           </a:p>
@@ -3009,7 +3010,7 @@
           <a:p>
             <a:r>
               <a:rPr lang="en-US" dirty="0"/>
-              <a:t/>
+              <a:t>Pergunta 5. Em municípios pequenos, para reduzir a oscilação das taxas, recomenda-se: Letra a: Usar números absolutos. Letra b: Usar médias de vários anos. Letra c: Ignorar os dados. Letra d: Usar apenas o IDH. Pause o vídeo e escolha a sua resposta.</a:t>
             </a:r>
             <a:endParaRPr lang="en-US" dirty="0"/>
           </a:p>
@@ -3097,7 +3098,7 @@
           <a:p>
             <a:r>
               <a:rPr lang="en-US" dirty="0"/>
-              <a:t/>
+              <a:t>A resposta correta é a letra b: Usar médias de vários anos. Com poucos eventos, as taxas oscilam muito; médias trienais suavizam essa variação.</a:t>
             </a:r>
             <a:endParaRPr lang="en-US" dirty="0"/>
           </a:p>
@@ -3121,6 +3122,94 @@
             <a:fld id="{F7021451-1387-4CA6-816F-3879F97B5CBC}" type="slidenum">
               <a:rPr lang="en-US"/>
               <a:t>27</a:t>
+            </a:fld>
+            <a:endParaRPr lang="en-US"/>
+          </a:p>
+        </p:txBody>
+      </p:sp>
+    </p:spTree>
+    <p:extLst>
+      <p:ext uri="{BB962C8B-B14F-4D97-AF65-F5344CB8AC3E}">
+        <p14:creationId xmlns:p14="http://schemas.microsoft.com/office/powerpoint/2010/main" val="1024086991"/>
+      </p:ext>
+    </p:extLst>
+  </p:cSld>
+  <p:clrMapOvr>
+    <a:masterClrMapping/>
+  </p:clrMapOvr>
+</p:notes>
+</file>
+
+<file path=ppt/notesSlides/notesSlide28.xml><?xml version="1.0" encoding="utf-8"?>
+<p:notes xmlns:a="http://schemas.openxmlformats.org/drawingml/2006/main" xmlns:r="http://schemas.openxmlformats.org/officeDocument/2006/relationships" xmlns:p="http://schemas.openxmlformats.org/presentationml/2006/main">
+  <p:cSld>
+    <p:spTree>
+      <p:nvGrpSpPr>
+        <p:cNvPr id="1" name=""/>
+        <p:cNvGrpSpPr/>
+        <p:nvPr/>
+      </p:nvGrpSpPr>
+      <p:grpSpPr>
+        <a:xfrm>
+          <a:off x="0" y="0"/>
+          <a:ext cx="0" cy="0"/>
+          <a:chOff x="0" y="0"/>
+          <a:chExt cx="0" cy="0"/>
+        </a:xfrm>
+      </p:grpSpPr>
+      <p:sp>
+        <p:nvSpPr>
+          <p:cNvPr id="2" name="Slide Image Placeholder 1"/>
+          <p:cNvSpPr>
+            <a:spLocks noGrp="1" noRot="1" noChangeAspect="1"/>
+          </p:cNvSpPr>
+          <p:nvPr>
+            <p:ph type="sldImg"/>
+          </p:nvPr>
+        </p:nvSpPr>
+        <p:spPr/>
+      </p:sp>
+      <p:sp>
+        <p:nvSpPr>
+          <p:cNvPr id="3" name="Notes Placeholder 2"/>
+          <p:cNvSpPr>
+            <a:spLocks noGrp="1"/>
+          </p:cNvSpPr>
+          <p:nvPr>
+            <p:ph type="body" idx="1"/>
+          </p:nvPr>
+        </p:nvSpPr>
+        <p:spPr/>
+        <p:txBody>
+          <a:bodyPr/>
+          <a:lstStyle/>
+          <a:p>
+            <a:r>
+              <a:rPr lang="en-US" dirty="0"/>
+              <a:t>Para fechar a Unidade 2, vamos recapitular. [Apontar para o quadro da esquerda.] No tópico 3, vimos que cada fase da política pede indicadores diferentes, de contexto, de metas, de processo, de resultado e de impacto, e distinguimos eficiência, eficácia e efetividade. [Apontar para o quadro da direita.] No tópico 4, vimos o que é um diagnóstico socioeconômico e onde ele é usado, o roteiro em seis passos, as dimensões e os seus indicadores, a importância de comparar no tempo, no espaço e com metas, de desagregar, e os cuidados na leitura. Na próxima unidade, os produtores de dados e as fontes de informação. Boa prova na A1 e até a próxima videoaula!</a:t>
+            </a:r>
+            <a:endParaRPr lang="en-US" dirty="0"/>
+          </a:p>
+        </p:txBody>
+      </p:sp>
+      <p:sp>
+        <p:nvSpPr>
+          <p:cNvPr id="4" name="Slide Number Placeholder 3"/>
+          <p:cNvSpPr>
+            <a:spLocks noGrp="1"/>
+          </p:cNvSpPr>
+          <p:nvPr>
+            <p:ph type="sldNum" sz="quarter" idx="10"/>
+          </p:nvPr>
+        </p:nvSpPr>
+        <p:spPr/>
+        <p:txBody>
+          <a:bodyPr/>
+          <a:lstStyle/>
+          <a:p>
+            <a:fld id="{F7021451-1387-4CA6-816F-3879F97B5CBC}" type="slidenum">
+              <a:rPr lang="en-US"/>
+              <a:t>28</a:t>
             </a:fld>
             <a:endParaRPr lang="en-US"/>
           </a:p>
@@ -3185,7 +3274,7 @@
           <a:p>
             <a:r>
               <a:rPr lang="en-US" dirty="0"/>
-              <a:t/>
+              <a:t>Parte 1, que corresponde ao tópico 3 do sumário: indicadores no ciclo das políticas públicas, do diagnóstico à avaliação.</a:t>
             </a:r>
             <a:endParaRPr lang="en-US" dirty="0"/>
           </a:p>
@@ -3273,7 +3362,7 @@
           <a:p>
             <a:r>
               <a:rPr lang="en-US" dirty="0"/>
-              <a:t/>
+              <a:t>Toda política pública passa por fases, e cada fase faz uma pergunta. No diagnóstico: qual é o problema, qual o tamanho e quem é afetado? Na formulação: quais metas e qual público priorizar? Na implementação: as ações estão acontecendo como previsto? E na avaliação: a política produziu os efeitos esperados? Por isso, cada fase pede indicadores diferentes: de contexto no diagnóstico, de metas na formulação, de processo no monitoramento da implementação e de resultado e impacto na avaliação.</a:t>
             </a:r>
             <a:endParaRPr lang="en-US" dirty="0"/>
           </a:p>
@@ -3361,7 +3450,7 @@
           <a:p>
             <a:r>
               <a:rPr lang="en-US" dirty="0"/>
-              <a:t/>
+              <a:t>Três conceitos aparecem sempre na avaliação de políticas, e a tabela usa um programa de vacinação como exemplo. A eficiência é a relação entre resultados e custos: o custo por dose aplicada. A eficácia é o grau de alcance das metas: 95% da meta de cobertura vacinal atingida. E a efetividade é a mudança nas condições da população, o impacto: a queda das internações por doenças evitáveis. Atenção: um programa pode ser eficiente e eficaz sem ser efetivo, ou seja, cumprir metas baratas que não mudam a realidade.</a:t>
             </a:r>
             <a:endParaRPr lang="en-US" dirty="0"/>
           </a:p>
@@ -3449,7 +3538,7 @@
           <a:p>
             <a:r>
               <a:rPr lang="en-US" dirty="0"/>
-              <a:t/>
+              <a:t>Agora, a Parte 2, que corresponde ao tópico 4 do sumário: o diagnóstico socioeconômico, um retrato do território para orientar prioridades.</a:t>
             </a:r>
             <a:endParaRPr lang="en-US" dirty="0"/>
           </a:p>
@@ -3537,7 +3626,7 @@
           <a:p>
             <a:r>
               <a:rPr lang="en-US" dirty="0"/>
-              <a:t/>
+              <a:t>O diagnóstico socioeconômico é um retrato organizado das condições de vida da população de um território, construído com indicadores, para orientar a definição de prioridades. Ele aparece em vários instrumentos da gestão: no PPA e na LDO, com os programas e metas do governo; nos planos municipais de saúde, educação e assistência social; no Plano Diretor, com o uso do solo, a moradia e a infraestrutura; e também em editais, convênios e na captação de recursos.</a:t>
             </a:r>
             <a:endParaRPr lang="en-US" dirty="0"/>
           </a:p>
@@ -3625,7 +3714,7 @@
           <a:p>
             <a:r>
               <a:rPr lang="en-US" dirty="0"/>
-              <a:t/>
+              <a:t>Como se faz um diagnóstico? A tabela mostra um roteiro em seis passos, com o exemplo do Plano Municipal de Educação. Primeiro, definir o objetivo e o território: o município e os seus bairros. Segundo, selecionar as dimensões e os indicadores: acesso, fluxo e aprendizagem escolar. Terceiro, levantar dados e fontes: o Censo Escolar, o IDEB e o Censo 2022, sempre com o ano de referência. Quarto, comparar e analisar: no tempo, com o estado e o país, e entre os bairros. Quinto, identificar prioridades e os grupos mais afetados. E sexto, comunicar, com tabelas, gráficos e mapas simples, sempre com fonte e ano.</a:t>
             </a:r>
             <a:endParaRPr lang="en-US" dirty="0"/>
           </a:p>
@@ -3713,7 +3802,7 @@
           <a:p>
             <a:r>
               <a:rPr lang="en-US" dirty="0"/>
-              <a:t/>
+              <a:t>Esta tabela mostra as principais dimensões de um diagnóstico e exemplos de indicadores para cada uma. Demografia: população por idade e taxa de crescimento. Educação: atendimento em creche, IDEB e distorção idade-série. Saúde: mortalidade infantil, cobertura vacinal e gestantes com sete ou mais consultas. Trabalho e renda: saldo de empregos formais e renda per capita. Habitação e saneamento: domicílios com esgotamento adequado. Assistência social: famílias no CadÚnico por mil habitantes. Segurança: homicídios por 100 mil habitantes. E finanças públicas: receita própria sobre a receita total e gasto com pessoal sobre a receita corrente líquida.</a:t>
             </a:r>
             <a:endParaRPr lang="en-US" dirty="0"/>
           </a:p>
@@ -5135,7 +5224,7 @@
                 <a:ea typeface="Calibri" pitchFamily="34" charset="-122"/>
                 <a:cs typeface="Calibri" pitchFamily="34" charset="-120"/>
               </a:rPr>
-              <a:t>Indicadores Socioeconômicos · Unidade 2</a:t>
+              <a:t>Indicadores Socioeconômicos · Unidade 2 · Tópico 4 do sumário</a:t>
             </a:r>
             <a:endParaRPr lang="en-US" sz="950" dirty="0"/>
           </a:p>
@@ -5572,7 +5661,7 @@
                 <a:ea typeface="Calibri" pitchFamily="34" charset="-122"/>
                 <a:cs typeface="Calibri" pitchFamily="34" charset="-120"/>
               </a:rPr>
-              <a:t>Indicadores Socioeconômicos · Unidade 2</a:t>
+              <a:t>Indicadores Socioeconômicos · Unidade 2 · Tópico 4 do sumário</a:t>
             </a:r>
             <a:endParaRPr lang="en-US" sz="950" dirty="0"/>
           </a:p>
@@ -6247,7 +6336,7 @@
                 <a:ea typeface="Calibri" pitchFamily="34" charset="-122"/>
                 <a:cs typeface="Calibri" pitchFamily="34" charset="-120"/>
               </a:rPr>
-              <a:t>Indicadores Socioeconômicos · Unidade 2</a:t>
+              <a:t>Indicadores Socioeconômicos · Unidade 2 · Tópico 4 do sumário</a:t>
             </a:r>
             <a:endParaRPr lang="en-US" sz="950" dirty="0"/>
           </a:p>
@@ -6684,7 +6773,7 @@
                 <a:ea typeface="Calibri" pitchFamily="34" charset="-122"/>
                 <a:cs typeface="Calibri" pitchFamily="34" charset="-120"/>
               </a:rPr>
-              <a:t>Indicadores Socioeconômicos · Unidade 2</a:t>
+              <a:t>Indicadores Socioeconômicos · Unidade 2 · Tópico 4 do sumário</a:t>
             </a:r>
             <a:endParaRPr lang="en-US" sz="950" dirty="0"/>
           </a:p>
@@ -8024,7 +8113,7 @@
                 <a:ea typeface="Calibri" pitchFamily="34" charset="-122"/>
                 <a:cs typeface="Calibri" pitchFamily="34" charset="-120"/>
               </a:rPr>
-              <a:t>Indicadores Socioeconômicos · Unidade 2</a:t>
+              <a:t>Indicadores Socioeconômicos · Unidade 2 · Tópico 4 do sumário</a:t>
             </a:r>
             <a:endParaRPr lang="en-US" sz="950" dirty="0"/>
           </a:p>
@@ -8461,7 +8550,7 @@
                 <a:ea typeface="Calibri" pitchFamily="34" charset="-122"/>
                 <a:cs typeface="Calibri" pitchFamily="34" charset="-120"/>
               </a:rPr>
-              <a:t>Indicadores Socioeconômicos · Unidade 2</a:t>
+              <a:t>Indicadores Socioeconômicos · Unidade 2 · Tópico 4 do sumário</a:t>
             </a:r>
             <a:endParaRPr lang="en-US" sz="950" dirty="0"/>
           </a:p>
@@ -11511,7 +11600,7 @@
                 <a:ea typeface="Calibri" pitchFamily="34" charset="-122"/>
                 <a:cs typeface="Calibri" pitchFamily="34" charset="-120"/>
               </a:rPr>
-              <a:t>Página de conteúdos: Unidades 3 e 4 · Exercícios de fixação 1 · A1</a:t>
+              <a:t>Página de conteúdos: tópicos 3 e 4 do sumário · Exercícios de fixação 1 · A1</a:t>
             </a:r>
             <a:endParaRPr lang="en-US" sz="1500" dirty="0"/>
           </a:p>
@@ -16777,6 +16866,581 @@
 </p:sld>
 </file>
 
+<file path=ppt/slides/slide28.xml><?xml version="1.0" encoding="utf-8"?>
+<p:sld xmlns:a="http://schemas.openxmlformats.org/drawingml/2006/main" xmlns:r="http://schemas.openxmlformats.org/officeDocument/2006/relationships" xmlns:p="http://schemas.openxmlformats.org/presentationml/2006/main">
+  <p:cSld name="Slide 28">
+    <p:bg>
+      <p:bgPr>
+        <a:blipFill dpi="0" rotWithShape="1">
+          <a:blip r:embed="rId1">
+            <a:lum/>
+          </a:blip>
+          <a:srcRect/>
+          <a:stretch>
+            <a:fillRect/>
+          </a:stretch>
+        </a:blipFill>
+        <a:effectLst/>
+      </p:bgPr>
+    </p:bg>
+    <p:spTree>
+      <p:nvGrpSpPr>
+        <p:cNvPr id="1" name=""/>
+        <p:cNvGrpSpPr/>
+        <p:nvPr/>
+      </p:nvGrpSpPr>
+      <p:grpSpPr>
+        <a:xfrm>
+          <a:off x="0" y="0"/>
+          <a:ext cx="0" cy="0"/>
+          <a:chOff x="0" y="0"/>
+          <a:chExt cx="0" cy="0"/>
+        </a:xfrm>
+      </p:grpSpPr>
+      <p:sp>
+        <p:nvSpPr>
+          <p:cNvPr id="2" name="Text 0"/>
+          <p:cNvSpPr txBox="1"/>
+          <p:nvPr/>
+        </p:nvSpPr>
+        <p:spPr>
+          <a:xfrm>
+            <a:off x="731520" y="256032"/>
+            <a:ext cx="7680960" cy="566928"/>
+          </a:xfrm>
+          <a:prstGeom prst="rect">
+            <a:avLst/>
+          </a:prstGeom>
+          <a:noFill/>
+          <a:ln/>
+        </p:spPr>
+        <p:txBody>
+          <a:bodyPr wrap="square" lIns="0" tIns="0" rIns="0" bIns="0" rtlCol="0" anchor="ctr"/>
+          <a:lstStyle/>
+          <a:p>
+            <a:pPr algn="ctr" indent="0" marL="0">
+              <a:lnSpc>
+                <a:spcPct val="100000"/>
+              </a:lnSpc>
+              <a:buNone/>
+            </a:pPr>
+            <a:r>
+              <a:rPr lang="en-US" sz="2800" b="1" dirty="0">
+                <a:solidFill>
+                  <a:srgbClr val="13294B"/>
+                </a:solidFill>
+                <a:latin typeface="Calibri" pitchFamily="34" charset="0"/>
+                <a:ea typeface="Calibri" pitchFamily="34" charset="-122"/>
+                <a:cs typeface="Calibri" pitchFamily="34" charset="-120"/>
+              </a:rPr>
+              <a:t>Resumo da Unidade 2</a:t>
+            </a:r>
+            <a:endParaRPr lang="en-US" sz="2800" dirty="0"/>
+          </a:p>
+        </p:txBody>
+      </p:sp>
+      <p:sp>
+        <p:nvSpPr>
+          <p:cNvPr id="3" name="Text 1"/>
+          <p:cNvSpPr txBox="1"/>
+          <p:nvPr/>
+        </p:nvSpPr>
+        <p:spPr>
+          <a:xfrm>
+            <a:off x="1005840" y="804672"/>
+            <a:ext cx="7132320" cy="329184"/>
+          </a:xfrm>
+          <a:prstGeom prst="rect">
+            <a:avLst/>
+          </a:prstGeom>
+          <a:noFill/>
+          <a:ln/>
+        </p:spPr>
+        <p:txBody>
+          <a:bodyPr wrap="square" lIns="0" tIns="0" rIns="0" bIns="0" rtlCol="0" anchor="ctr"/>
+          <a:lstStyle/>
+          <a:p>
+            <a:pPr algn="ctr" indent="0" marL="0">
+              <a:lnSpc>
+                <a:spcPct val="100000"/>
+              </a:lnSpc>
+              <a:buNone/>
+            </a:pPr>
+            <a:r>
+              <a:rPr lang="en-US" sz="1400" dirty="0">
+                <a:solidFill>
+                  <a:srgbClr val="5B6770"/>
+                </a:solidFill>
+                <a:latin typeface="Calibri" pitchFamily="34" charset="0"/>
+                <a:ea typeface="Calibri" pitchFamily="34" charset="-122"/>
+                <a:cs typeface="Calibri" pitchFamily="34" charset="-120"/>
+              </a:rPr>
+              <a:t>O que discutimos nesta unidade</a:t>
+            </a:r>
+            <a:endParaRPr lang="en-US" sz="1400" dirty="0"/>
+          </a:p>
+        </p:txBody>
+      </p:sp>
+      <p:sp>
+        <p:nvSpPr>
+          <p:cNvPr id="4" name="Text 2"/>
+          <p:cNvSpPr txBox="1"/>
+          <p:nvPr/>
+        </p:nvSpPr>
+        <p:spPr>
+          <a:xfrm>
+            <a:off x="685800" y="1170432"/>
+            <a:ext cx="3794760" cy="2743200"/>
+          </a:xfrm>
+          <a:prstGeom prst="roundRect">
+            <a:avLst>
+              <a:gd name="adj" fmla="val 2000"/>
+            </a:avLst>
+          </a:prstGeom>
+          <a:solidFill>
+            <a:srgbClr val="FFFFFF"/>
+          </a:solidFill>
+          <a:ln w="12700">
+            <a:solidFill>
+              <a:srgbClr val="DCD5C1"/>
+            </a:solidFill>
+          </a:ln>
+        </p:spPr>
+        <p:txBody>
+          <a:bodyPr wrap="square" lIns="114300" tIns="114300" rIns="114300" bIns="114300" rtlCol="0" anchor="t"/>
+          <a:lstStyle/>
+          <a:p>
+            <a:pPr algn="l" indent="0" marL="0">
+              <a:lnSpc>
+                <a:spcPct val="100000"/>
+              </a:lnSpc>
+              <a:spcAft>
+                <a:spcPts val="200"/>
+              </a:spcAft>
+              <a:buNone/>
+            </a:pPr>
+            <a:r>
+              <a:rPr lang="en-US" sz="1100" b="1" dirty="0">
+                <a:solidFill>
+                  <a:srgbClr val="2A8C85"/>
+                </a:solidFill>
+                <a:latin typeface="Calibri" pitchFamily="34" charset="0"/>
+                <a:ea typeface="Calibri" pitchFamily="34" charset="-122"/>
+                <a:cs typeface="Calibri" pitchFamily="34" charset="-120"/>
+              </a:rPr>
+              <a:t>PARTE 1 · TÓPICO 3</a:t>
+            </a:r>
+            <a:endParaRPr lang="en-US" sz="1100" dirty="0"/>
+          </a:p>
+          <a:p>
+            <a:pPr algn="l" indent="0" marL="0">
+              <a:lnSpc>
+                <a:spcPct val="100000"/>
+              </a:lnSpc>
+              <a:spcAft>
+                <a:spcPts val="400"/>
+              </a:spcAft>
+              <a:buNone/>
+            </a:pPr>
+            <a:r>
+              <a:rPr lang="en-US" sz="1450" b="1" dirty="0">
+                <a:solidFill>
+                  <a:srgbClr val="13294B"/>
+                </a:solidFill>
+                <a:latin typeface="Calibri" pitchFamily="34" charset="0"/>
+                <a:ea typeface="Calibri" pitchFamily="34" charset="-122"/>
+                <a:cs typeface="Calibri" pitchFamily="34" charset="-120"/>
+              </a:rPr>
+              <a:t>Indicadores no ciclo das políticas públicas</a:t>
+            </a:r>
+            <a:endParaRPr lang="en-US" sz="1100" dirty="0"/>
+          </a:p>
+          <a:p>
+            <a:pPr algn="l" marL="177800" indent="-177800">
+              <a:lnSpc>
+                <a:spcPct val="100000"/>
+              </a:lnSpc>
+              <a:spcAft>
+                <a:spcPts val="300"/>
+              </a:spcAft>
+              <a:buSzPct val="100000"/>
+              <a:buChar char="•"/>
+            </a:pPr>
+            <a:r>
+              <a:rPr lang="en-US" sz="1200" dirty="0">
+                <a:solidFill>
+                  <a:srgbClr val="1F2A37"/>
+                </a:solidFill>
+                <a:latin typeface="Calibri" pitchFamily="34" charset="0"/>
+                <a:ea typeface="Calibri" pitchFamily="34" charset="-122"/>
+                <a:cs typeface="Calibri" pitchFamily="34" charset="-120"/>
+              </a:rPr>
+              <a:t>Cada fase pede indicadores: de contexto, de metas, de processo, de resultado e de impacto.</a:t>
+            </a:r>
+            <a:endParaRPr lang="en-US" sz="1100" dirty="0"/>
+          </a:p>
+          <a:p>
+            <a:pPr algn="l" marL="177800" indent="-177800">
+              <a:lnSpc>
+                <a:spcPct val="100000"/>
+              </a:lnSpc>
+              <a:spcAft>
+                <a:spcPts val="300"/>
+              </a:spcAft>
+              <a:buSzPct val="100000"/>
+              <a:buChar char="•"/>
+            </a:pPr>
+            <a:r>
+              <a:rPr lang="en-US" sz="1200" dirty="0">
+                <a:solidFill>
+                  <a:srgbClr val="1F2A37"/>
+                </a:solidFill>
+                <a:latin typeface="Calibri" pitchFamily="34" charset="0"/>
+                <a:ea typeface="Calibri" pitchFamily="34" charset="-122"/>
+                <a:cs typeface="Calibri" pitchFamily="34" charset="-120"/>
+              </a:rPr>
+              <a:t>Eficiência: resultados em relação aos custos.</a:t>
+            </a:r>
+            <a:endParaRPr lang="en-US" sz="1100" dirty="0"/>
+          </a:p>
+          <a:p>
+            <a:pPr algn="l" marL="177800" indent="-177800">
+              <a:lnSpc>
+                <a:spcPct val="100000"/>
+              </a:lnSpc>
+              <a:spcAft>
+                <a:spcPts val="300"/>
+              </a:spcAft>
+              <a:buSzPct val="100000"/>
+              <a:buChar char="•"/>
+            </a:pPr>
+            <a:r>
+              <a:rPr lang="en-US" sz="1200" dirty="0">
+                <a:solidFill>
+                  <a:srgbClr val="1F2A37"/>
+                </a:solidFill>
+                <a:latin typeface="Calibri" pitchFamily="34" charset="0"/>
+                <a:ea typeface="Calibri" pitchFamily="34" charset="-122"/>
+                <a:cs typeface="Calibri" pitchFamily="34" charset="-120"/>
+              </a:rPr>
+              <a:t>Eficácia: grau de alcance das metas.</a:t>
+            </a:r>
+            <a:endParaRPr lang="en-US" sz="1100" dirty="0"/>
+          </a:p>
+          <a:p>
+            <a:pPr algn="l" marL="177800" indent="-177800">
+              <a:lnSpc>
+                <a:spcPct val="100000"/>
+              </a:lnSpc>
+              <a:spcAft>
+                <a:spcPts val="300"/>
+              </a:spcAft>
+              <a:buSzPct val="100000"/>
+              <a:buChar char="•"/>
+            </a:pPr>
+            <a:r>
+              <a:rPr lang="en-US" sz="1200" dirty="0">
+                <a:solidFill>
+                  <a:srgbClr val="1F2A37"/>
+                </a:solidFill>
+                <a:latin typeface="Calibri" pitchFamily="34" charset="0"/>
+                <a:ea typeface="Calibri" pitchFamily="34" charset="-122"/>
+                <a:cs typeface="Calibri" pitchFamily="34" charset="-120"/>
+              </a:rPr>
+              <a:t>Efetividade: mudança nas condições da população.</a:t>
+            </a:r>
+            <a:endParaRPr lang="en-US" sz="1100" dirty="0"/>
+          </a:p>
+        </p:txBody>
+      </p:sp>
+      <p:sp>
+        <p:nvSpPr>
+          <p:cNvPr id="5" name="Text 3"/>
+          <p:cNvSpPr txBox="1"/>
+          <p:nvPr/>
+        </p:nvSpPr>
+        <p:spPr>
+          <a:xfrm>
+            <a:off x="4663440" y="1170432"/>
+            <a:ext cx="3794760" cy="2743200"/>
+          </a:xfrm>
+          <a:prstGeom prst="roundRect">
+            <a:avLst>
+              <a:gd name="adj" fmla="val 2000"/>
+            </a:avLst>
+          </a:prstGeom>
+          <a:solidFill>
+            <a:srgbClr val="E6F2F0"/>
+          </a:solidFill>
+          <a:ln/>
+        </p:spPr>
+        <p:txBody>
+          <a:bodyPr wrap="square" lIns="114300" tIns="114300" rIns="114300" bIns="114300" rtlCol="0" anchor="t"/>
+          <a:lstStyle/>
+          <a:p>
+            <a:pPr algn="l" indent="0" marL="0">
+              <a:lnSpc>
+                <a:spcPct val="100000"/>
+              </a:lnSpc>
+              <a:spcAft>
+                <a:spcPts val="200"/>
+              </a:spcAft>
+              <a:buNone/>
+            </a:pPr>
+            <a:r>
+              <a:rPr lang="en-US" sz="1100" b="1" dirty="0">
+                <a:solidFill>
+                  <a:srgbClr val="2A8C85"/>
+                </a:solidFill>
+                <a:latin typeface="Calibri" pitchFamily="34" charset="0"/>
+                <a:ea typeface="Calibri" pitchFamily="34" charset="-122"/>
+                <a:cs typeface="Calibri" pitchFamily="34" charset="-120"/>
+              </a:rPr>
+              <a:t>PARTE 2 · TÓPICO 4</a:t>
+            </a:r>
+            <a:endParaRPr lang="en-US" sz="1100" dirty="0"/>
+          </a:p>
+          <a:p>
+            <a:pPr algn="l" indent="0" marL="0">
+              <a:lnSpc>
+                <a:spcPct val="100000"/>
+              </a:lnSpc>
+              <a:spcAft>
+                <a:spcPts val="400"/>
+              </a:spcAft>
+              <a:buNone/>
+            </a:pPr>
+            <a:r>
+              <a:rPr lang="en-US" sz="1450" b="1" dirty="0">
+                <a:solidFill>
+                  <a:srgbClr val="13294B"/>
+                </a:solidFill>
+                <a:latin typeface="Calibri" pitchFamily="34" charset="0"/>
+                <a:ea typeface="Calibri" pitchFamily="34" charset="-122"/>
+                <a:cs typeface="Calibri" pitchFamily="34" charset="-120"/>
+              </a:rPr>
+              <a:t>O diagnóstico socioeconômico</a:t>
+            </a:r>
+            <a:endParaRPr lang="en-US" sz="1100" dirty="0"/>
+          </a:p>
+          <a:p>
+            <a:pPr algn="l" marL="177800" indent="-177800">
+              <a:lnSpc>
+                <a:spcPct val="100000"/>
+              </a:lnSpc>
+              <a:spcAft>
+                <a:spcPts val="300"/>
+              </a:spcAft>
+              <a:buSzPct val="100000"/>
+              <a:buChar char="•"/>
+            </a:pPr>
+            <a:r>
+              <a:rPr lang="en-US" sz="1200" dirty="0">
+                <a:solidFill>
+                  <a:srgbClr val="1F2A37"/>
+                </a:solidFill>
+                <a:latin typeface="Calibri" pitchFamily="34" charset="0"/>
+                <a:ea typeface="Calibri" pitchFamily="34" charset="-122"/>
+                <a:cs typeface="Calibri" pitchFamily="34" charset="-120"/>
+              </a:rPr>
+              <a:t>Retrato do território que orienta prioridades (PPA, LDO, planos setoriais).</a:t>
+            </a:r>
+            <a:endParaRPr lang="en-US" sz="1100" dirty="0"/>
+          </a:p>
+          <a:p>
+            <a:pPr algn="l" marL="177800" indent="-177800">
+              <a:lnSpc>
+                <a:spcPct val="100000"/>
+              </a:lnSpc>
+              <a:spcAft>
+                <a:spcPts val="300"/>
+              </a:spcAft>
+              <a:buSzPct val="100000"/>
+              <a:buChar char="•"/>
+            </a:pPr>
+            <a:r>
+              <a:rPr lang="en-US" sz="1200" dirty="0">
+                <a:solidFill>
+                  <a:srgbClr val="1F2A37"/>
+                </a:solidFill>
+                <a:latin typeface="Calibri" pitchFamily="34" charset="0"/>
+                <a:ea typeface="Calibri" pitchFamily="34" charset="-122"/>
+                <a:cs typeface="Calibri" pitchFamily="34" charset="-120"/>
+              </a:rPr>
+              <a:t>Roteiro em seis passos, do objetivo à comunicação.</a:t>
+            </a:r>
+            <a:endParaRPr lang="en-US" sz="1100" dirty="0"/>
+          </a:p>
+          <a:p>
+            <a:pPr algn="l" marL="177800" indent="-177800">
+              <a:lnSpc>
+                <a:spcPct val="100000"/>
+              </a:lnSpc>
+              <a:spcAft>
+                <a:spcPts val="300"/>
+              </a:spcAft>
+              <a:buSzPct val="100000"/>
+              <a:buChar char="•"/>
+            </a:pPr>
+            <a:r>
+              <a:rPr lang="en-US" sz="1200" dirty="0">
+                <a:solidFill>
+                  <a:srgbClr val="1F2A37"/>
+                </a:solidFill>
+                <a:latin typeface="Calibri" pitchFamily="34" charset="0"/>
+                <a:ea typeface="Calibri" pitchFamily="34" charset="-122"/>
+                <a:cs typeface="Calibri" pitchFamily="34" charset="-120"/>
+              </a:rPr>
+              <a:t>Oito dimensões, da demografia às finanças públicas.</a:t>
+            </a:r>
+            <a:endParaRPr lang="en-US" sz="1100" dirty="0"/>
+          </a:p>
+          <a:p>
+            <a:pPr algn="l" marL="177800" indent="-177800">
+              <a:lnSpc>
+                <a:spcPct val="100000"/>
+              </a:lnSpc>
+              <a:spcAft>
+                <a:spcPts val="300"/>
+              </a:spcAft>
+              <a:buSzPct val="100000"/>
+              <a:buChar char="•"/>
+            </a:pPr>
+            <a:r>
+              <a:rPr lang="en-US" sz="1200" dirty="0">
+                <a:solidFill>
+                  <a:srgbClr val="1F2A37"/>
+                </a:solidFill>
+                <a:latin typeface="Calibri" pitchFamily="34" charset="0"/>
+                <a:ea typeface="Calibri" pitchFamily="34" charset="-122"/>
+                <a:cs typeface="Calibri" pitchFamily="34" charset="-120"/>
+              </a:rPr>
+              <a:t>Comparar no tempo, no espaço e com metas; desagregar.</a:t>
+            </a:r>
+            <a:endParaRPr lang="en-US" sz="1100" dirty="0"/>
+          </a:p>
+          <a:p>
+            <a:pPr algn="l" marL="177800" indent="-177800">
+              <a:lnSpc>
+                <a:spcPct val="100000"/>
+              </a:lnSpc>
+              <a:spcAft>
+                <a:spcPts val="300"/>
+              </a:spcAft>
+              <a:buSzPct val="100000"/>
+              <a:buChar char="•"/>
+            </a:pPr>
+            <a:r>
+              <a:rPr lang="en-US" sz="1200" dirty="0">
+                <a:solidFill>
+                  <a:srgbClr val="1F2A37"/>
+                </a:solidFill>
+                <a:latin typeface="Calibri" pitchFamily="34" charset="0"/>
+                <a:ea typeface="Calibri" pitchFamily="34" charset="-122"/>
+                <a:cs typeface="Calibri" pitchFamily="34" charset="-120"/>
+              </a:rPr>
+              <a:t>Cuidados: taxas, pequenos números, denominadores e método.</a:t>
+            </a:r>
+            <a:endParaRPr lang="en-US" sz="1100" dirty="0"/>
+          </a:p>
+        </p:txBody>
+      </p:sp>
+      <p:sp>
+        <p:nvSpPr>
+          <p:cNvPr id="6" name="Text 4"/>
+          <p:cNvSpPr txBox="1"/>
+          <p:nvPr/>
+        </p:nvSpPr>
+        <p:spPr>
+          <a:xfrm>
+            <a:off x="685800" y="3995928"/>
+            <a:ext cx="7772400" cy="484632"/>
+          </a:xfrm>
+          <a:prstGeom prst="roundRect">
+            <a:avLst>
+              <a:gd name="adj" fmla="val 15094"/>
+            </a:avLst>
+          </a:prstGeom>
+          <a:solidFill>
+            <a:srgbClr val="E6F2F0"/>
+          </a:solidFill>
+          <a:ln/>
+        </p:spPr>
+        <p:txBody>
+          <a:bodyPr wrap="square" lIns="127000" tIns="127000" rIns="127000" bIns="127000" rtlCol="0" anchor="ctr"/>
+          <a:lstStyle/>
+          <a:p>
+            <a:pPr algn="ctr" indent="0" marL="0">
+              <a:lnSpc>
+                <a:spcPct val="100000"/>
+              </a:lnSpc>
+              <a:buNone/>
+            </a:pPr>
+            <a:r>
+              <a:rPr lang="en-US" sz="1300" b="1" dirty="0">
+                <a:solidFill>
+                  <a:srgbClr val="13294B"/>
+                </a:solidFill>
+                <a:latin typeface="Calibri" pitchFamily="34" charset="0"/>
+                <a:ea typeface="Calibri" pitchFamily="34" charset="-122"/>
+                <a:cs typeface="Calibri" pitchFamily="34" charset="-120"/>
+              </a:rPr>
+              <a:t>Próxima unidade: produtores de dados, Censo, pesquisas do IBGE e registros administrativos.</a:t>
+            </a:r>
+            <a:endParaRPr lang="en-US" sz="1300" dirty="0"/>
+          </a:p>
+        </p:txBody>
+      </p:sp>
+      <p:sp>
+        <p:nvSpPr>
+          <p:cNvPr id="7" name="Text 5"/>
+          <p:cNvSpPr txBox="1"/>
+          <p:nvPr/>
+        </p:nvSpPr>
+        <p:spPr>
+          <a:xfrm>
+            <a:off x="4206240" y="36576"/>
+            <a:ext cx="4800600" cy="219456"/>
+          </a:xfrm>
+          <a:prstGeom prst="rect">
+            <a:avLst/>
+          </a:prstGeom>
+          <a:noFill/>
+          <a:ln/>
+        </p:spPr>
+        <p:txBody>
+          <a:bodyPr wrap="square" lIns="0" tIns="0" rIns="0" bIns="0" rtlCol="0" anchor="ctr"/>
+          <a:lstStyle/>
+          <a:p>
+            <a:pPr algn="r" indent="0" marL="0">
+              <a:lnSpc>
+                <a:spcPct val="100000"/>
+              </a:lnSpc>
+              <a:buNone/>
+            </a:pPr>
+            <a:r>
+              <a:rPr lang="en-US" sz="950" dirty="0">
+                <a:solidFill>
+                  <a:srgbClr val="5B6770"/>
+                </a:solidFill>
+                <a:latin typeface="Calibri" pitchFamily="34" charset="0"/>
+                <a:ea typeface="Calibri" pitchFamily="34" charset="-122"/>
+                <a:cs typeface="Calibri" pitchFamily="34" charset="-120"/>
+              </a:rPr>
+              <a:t>Indicadores Socioeconômicos · Unidade 2</a:t>
+            </a:r>
+            <a:endParaRPr lang="en-US" sz="950" dirty="0"/>
+          </a:p>
+        </p:txBody>
+      </p:sp>
+    </p:spTree>
+  </p:cSld>
+  <p:clrMapOvr>
+    <a:masterClrMapping/>
+  </p:clrMapOvr>
+</p:sld>
+</file>
+
 <file path=ppt/slides/slide3.xml><?xml version="1.0" encoding="utf-8"?>
 <p:sld xmlns:a="http://schemas.openxmlformats.org/drawingml/2006/main" xmlns:r="http://schemas.openxmlformats.org/officeDocument/2006/relationships" xmlns:p="http://schemas.openxmlformats.org/presentationml/2006/main">
   <p:cSld name="Slide 3">
@@ -16844,7 +17508,7 @@
                 <a:ea typeface="Calibri" pitchFamily="34" charset="-122"/>
                 <a:cs typeface="Calibri" pitchFamily="34" charset="-120"/>
               </a:rPr>
-              <a:t>PARTE 1</a:t>
+              <a:t>PARTE 1 · TÓPICO 3 DO SUMÁRIO</a:t>
             </a:r>
             <a:endParaRPr lang="en-US" sz="1600" dirty="0"/>
           </a:p>
@@ -16970,7 +17634,7 @@
                 <a:ea typeface="Calibri" pitchFamily="34" charset="-122"/>
                 <a:cs typeface="Calibri" pitchFamily="34" charset="-120"/>
               </a:rPr>
-              <a:t>Indicadores Socioeconômicos · Unidade 2</a:t>
+              <a:t>Indicadores Socioeconômicos · Unidade 2 · Tópico 3 do sumário</a:t>
             </a:r>
             <a:endParaRPr lang="en-US" sz="950" dirty="0"/>
           </a:p>
@@ -17473,7 +18137,7 @@
                 <a:ea typeface="Calibri" pitchFamily="34" charset="-122"/>
                 <a:cs typeface="Calibri" pitchFamily="34" charset="-120"/>
               </a:rPr>
-              <a:t>Cada fase pede indicadores diferentes: de contexto no diagnóstico, de processo no monitoramento e de resultado e impacto na avaliação.</a:t>
+              <a:t>Cada fase pede indicadores diferentes: de contexto no diagnóstico, de metas na formulação, de processo no monitoramento da implementação e de resultado e impacto na avaliação.</a:t>
             </a:r>
             <a:endParaRPr lang="en-US" sz="1400" dirty="0"/>
           </a:p>
@@ -17515,7 +18179,7 @@
                 <a:ea typeface="Calibri" pitchFamily="34" charset="-122"/>
                 <a:cs typeface="Calibri" pitchFamily="34" charset="-120"/>
               </a:rPr>
-              <a:t>Indicadores Socioeconômicos · Unidade 2</a:t>
+              <a:t>Indicadores Socioeconômicos · Unidade 2 · Tópico 3 do sumário</a:t>
             </a:r>
             <a:endParaRPr lang="en-US" sz="950" dirty="0"/>
           </a:p>
@@ -17604,490 +18268,904 @@
       </p:sp>
       <p:sp>
         <p:nvSpPr>
-          <p:cNvPr id="3" name="Shape 1"/>
-          <p:cNvSpPr/>
-          <p:nvPr/>
-        </p:nvSpPr>
-        <p:spPr>
-          <a:xfrm>
-            <a:off x="685800" y="1234440"/>
-            <a:ext cx="2456688" cy="1920240"/>
-          </a:xfrm>
-          <a:prstGeom prst="roundRect">
-            <a:avLst>
-              <a:gd name="adj" fmla="val 2857"/>
-            </a:avLst>
-          </a:prstGeom>
-          <a:solidFill>
-            <a:srgbClr val="FFFFFF"/>
-          </a:solidFill>
-          <a:ln w="12700">
-            <a:solidFill>
-              <a:srgbClr val="DCD5C1"/>
-            </a:solidFill>
-            <a:prstDash val="solid"/>
-          </a:ln>
-        </p:spPr>
-      </p:sp>
-      <p:sp>
-        <p:nvSpPr>
-          <p:cNvPr id="4" name="Shape 2"/>
-          <p:cNvSpPr/>
-          <p:nvPr/>
-        </p:nvSpPr>
-        <p:spPr>
-          <a:xfrm>
-            <a:off x="822960" y="1389888"/>
-            <a:ext cx="457200" cy="457200"/>
-          </a:xfrm>
-          <a:prstGeom prst="roundRect">
-            <a:avLst>
-              <a:gd name="adj" fmla="val 16000"/>
-            </a:avLst>
-          </a:prstGeom>
-          <a:solidFill>
-            <a:srgbClr val="13294B"/>
-          </a:solidFill>
-          <a:ln/>
-        </p:spPr>
-      </p:sp>
-      <p:pic>
-        <p:nvPicPr>
-          <p:cNvPr id="5" name="Image 0" descr="/tmp/claude-0/-home-user-zero-claude/d7e33190-c541-582c-a7cc-1156817732ce/scratchpad/deck/assets/icon_FaCoins.png">    </p:cNvPr>
-          <p:cNvPicPr>
-            <a:picLocks noChangeAspect="1"/>
-          </p:cNvPicPr>
-          <p:nvPr/>
-        </p:nvPicPr>
-        <p:blipFill>
-          <a:blip r:embed="rId2"/>
-          <a:stretch>
-            <a:fillRect/>
-          </a:stretch>
-        </p:blipFill>
-        <p:spPr>
-          <a:xfrm>
-            <a:off x="923544" y="1490472"/>
-            <a:ext cx="256032" cy="256032"/>
+          <p:cNvPr id="3" name="Text 1"/>
+          <p:cNvSpPr txBox="1"/>
+          <p:nvPr/>
+        </p:nvSpPr>
+        <p:spPr>
+          <a:xfrm>
+            <a:off x="1005840" y="804672"/>
+            <a:ext cx="7132320" cy="329184"/>
           </a:xfrm>
           <a:prstGeom prst="rect">
             <a:avLst/>
           </a:prstGeom>
-        </p:spPr>
-      </p:pic>
-      <p:sp>
-        <p:nvSpPr>
-          <p:cNvPr id="6" name="Text 3"/>
-          <p:cNvSpPr txBox="1"/>
-          <p:nvPr/>
-        </p:nvSpPr>
-        <p:spPr>
-          <a:xfrm>
-            <a:off x="1371600" y="1307592"/>
-            <a:ext cx="1679448" cy="1773936"/>
-          </a:xfrm>
-          <a:prstGeom prst="rect">
-            <a:avLst/>
-          </a:prstGeom>
           <a:noFill/>
           <a:ln/>
         </p:spPr>
         <p:txBody>
-          <a:bodyPr wrap="square" lIns="38100" tIns="38100" rIns="38100" bIns="38100" rtlCol="0" anchor="t"/>
-          <a:lstStyle/>
-          <a:p>
-            <a:pPr algn="l" indent="0" marL="0">
-              <a:lnSpc>
-                <a:spcPct val="100000"/>
-              </a:lnSpc>
-              <a:spcAft>
-                <a:spcPts val="200"/>
-              </a:spcAft>
-              <a:buNone/>
-            </a:pPr>
-            <a:r>
-              <a:rPr lang="en-US" sz="1100" b="1" dirty="0">
-                <a:solidFill>
-                  <a:srgbClr val="2A8C85"/>
-                </a:solidFill>
-                <a:latin typeface="Calibri" pitchFamily="34" charset="0"/>
-                <a:ea typeface="Calibri" pitchFamily="34" charset="-122"/>
-                <a:cs typeface="Calibri" pitchFamily="34" charset="-120"/>
-              </a:rPr>
-              <a:t>RECURSOS</a:t>
-            </a:r>
-            <a:endParaRPr lang="en-US" sz="1100" dirty="0"/>
-          </a:p>
-          <a:p>
-            <a:pPr algn="l" indent="0" marL="0">
-              <a:lnSpc>
-                <a:spcPct val="100000"/>
-              </a:lnSpc>
-              <a:spcAft>
-                <a:spcPts val="300"/>
-              </a:spcAft>
-              <a:buNone/>
-            </a:pPr>
-            <a:r>
-              <a:rPr lang="en-US" sz="1600" b="1" dirty="0">
-                <a:solidFill>
-                  <a:srgbClr val="13294B"/>
-                </a:solidFill>
-                <a:latin typeface="Calibri" pitchFamily="34" charset="0"/>
-                <a:ea typeface="Calibri" pitchFamily="34" charset="-122"/>
-                <a:cs typeface="Calibri" pitchFamily="34" charset="-120"/>
-              </a:rPr>
-              <a:t>Eficiência</a:t>
-            </a:r>
-            <a:endParaRPr lang="en-US" sz="1100" dirty="0"/>
-          </a:p>
-          <a:p>
-            <a:pPr algn="l" indent="0" marL="0">
-              <a:lnSpc>
-                <a:spcPct val="100000"/>
-              </a:lnSpc>
-              <a:buNone/>
-            </a:pPr>
-            <a:r>
-              <a:rPr lang="en-US" sz="1350" dirty="0">
-                <a:solidFill>
-                  <a:srgbClr val="1F2A37"/>
-                </a:solidFill>
-                <a:latin typeface="Calibri" pitchFamily="34" charset="0"/>
-                <a:ea typeface="Calibri" pitchFamily="34" charset="-122"/>
-                <a:cs typeface="Calibri" pitchFamily="34" charset="-120"/>
-              </a:rPr>
-              <a:t>Relação entre resultados e custos. Ex.: custo por dose de vacina aplicada.</a:t>
-            </a:r>
-            <a:endParaRPr lang="en-US" sz="1100" dirty="0"/>
-          </a:p>
-        </p:txBody>
-      </p:sp>
-      <p:sp>
-        <p:nvSpPr>
-          <p:cNvPr id="7" name="Shape 4"/>
-          <p:cNvSpPr/>
-          <p:nvPr/>
-        </p:nvSpPr>
-        <p:spPr>
-          <a:xfrm>
-            <a:off x="3343656" y="1234440"/>
-            <a:ext cx="2456688" cy="1920240"/>
-          </a:xfrm>
-          <a:prstGeom prst="roundRect">
-            <a:avLst>
-              <a:gd name="adj" fmla="val 2857"/>
-            </a:avLst>
-          </a:prstGeom>
-          <a:solidFill>
-            <a:srgbClr val="FFFFFF"/>
-          </a:solidFill>
-          <a:ln w="12700">
-            <a:solidFill>
-              <a:srgbClr val="DCD5C1"/>
-            </a:solidFill>
-            <a:prstDash val="solid"/>
-          </a:ln>
-        </p:spPr>
-      </p:sp>
-      <p:sp>
-        <p:nvSpPr>
-          <p:cNvPr id="8" name="Shape 5"/>
-          <p:cNvSpPr/>
-          <p:nvPr/>
-        </p:nvSpPr>
-        <p:spPr>
-          <a:xfrm>
-            <a:off x="3480816" y="1389888"/>
-            <a:ext cx="457200" cy="457200"/>
-          </a:xfrm>
-          <a:prstGeom prst="roundRect">
-            <a:avLst>
-              <a:gd name="adj" fmla="val 16000"/>
-            </a:avLst>
-          </a:prstGeom>
-          <a:solidFill>
-            <a:srgbClr val="13294B"/>
-          </a:solidFill>
-          <a:ln/>
-        </p:spPr>
-      </p:sp>
-      <p:pic>
-        <p:nvPicPr>
-          <p:cNvPr id="9" name="Image 1" descr="/tmp/claude-0/-home-user-zero-claude/d7e33190-c541-582c-a7cc-1156817732ce/scratchpad/deck/assets/icon_FaBullseye.png">    </p:cNvPr>
-          <p:cNvPicPr>
-            <a:picLocks noChangeAspect="1"/>
-          </p:cNvPicPr>
-          <p:nvPr/>
-        </p:nvPicPr>
-        <p:blipFill>
-          <a:blip r:embed="rId3"/>
-          <a:stretch>
-            <a:fillRect/>
-          </a:stretch>
-        </p:blipFill>
-        <p:spPr>
-          <a:xfrm>
-            <a:off x="3581400" y="1490472"/>
-            <a:ext cx="256032" cy="256032"/>
-          </a:xfrm>
-          <a:prstGeom prst="rect">
-            <a:avLst/>
-          </a:prstGeom>
-        </p:spPr>
-      </p:pic>
-      <p:sp>
-        <p:nvSpPr>
-          <p:cNvPr id="10" name="Text 6"/>
-          <p:cNvSpPr txBox="1"/>
-          <p:nvPr/>
-        </p:nvSpPr>
-        <p:spPr>
-          <a:xfrm>
-            <a:off x="4029456" y="1307592"/>
-            <a:ext cx="1679448" cy="1773936"/>
-          </a:xfrm>
-          <a:prstGeom prst="rect">
-            <a:avLst/>
-          </a:prstGeom>
-          <a:noFill/>
-          <a:ln/>
-        </p:spPr>
-        <p:txBody>
-          <a:bodyPr wrap="square" lIns="38100" tIns="38100" rIns="38100" bIns="38100" rtlCol="0" anchor="t"/>
-          <a:lstStyle/>
-          <a:p>
-            <a:pPr algn="l" indent="0" marL="0">
-              <a:lnSpc>
-                <a:spcPct val="100000"/>
-              </a:lnSpc>
-              <a:spcAft>
-                <a:spcPts val="200"/>
-              </a:spcAft>
-              <a:buNone/>
-            </a:pPr>
-            <a:r>
-              <a:rPr lang="en-US" sz="1100" b="1" dirty="0">
-                <a:solidFill>
-                  <a:srgbClr val="2A8C85"/>
-                </a:solidFill>
-                <a:latin typeface="Calibri" pitchFamily="34" charset="0"/>
-                <a:ea typeface="Calibri" pitchFamily="34" charset="-122"/>
-                <a:cs typeface="Calibri" pitchFamily="34" charset="-120"/>
-              </a:rPr>
-              <a:t>METAS</a:t>
-            </a:r>
-            <a:endParaRPr lang="en-US" sz="1100" dirty="0"/>
-          </a:p>
-          <a:p>
-            <a:pPr algn="l" indent="0" marL="0">
-              <a:lnSpc>
-                <a:spcPct val="100000"/>
-              </a:lnSpc>
-              <a:spcAft>
-                <a:spcPts val="300"/>
-              </a:spcAft>
-              <a:buNone/>
-            </a:pPr>
-            <a:r>
-              <a:rPr lang="en-US" sz="1600" b="1" dirty="0">
-                <a:solidFill>
-                  <a:srgbClr val="13294B"/>
-                </a:solidFill>
-                <a:latin typeface="Calibri" pitchFamily="34" charset="0"/>
-                <a:ea typeface="Calibri" pitchFamily="34" charset="-122"/>
-                <a:cs typeface="Calibri" pitchFamily="34" charset="-120"/>
-              </a:rPr>
-              <a:t>Eficácia</a:t>
-            </a:r>
-            <a:endParaRPr lang="en-US" sz="1100" dirty="0"/>
-          </a:p>
-          <a:p>
-            <a:pPr algn="l" indent="0" marL="0">
-              <a:lnSpc>
-                <a:spcPct val="100000"/>
-              </a:lnSpc>
-              <a:buNone/>
-            </a:pPr>
-            <a:r>
-              <a:rPr lang="en-US" sz="1350" dirty="0">
-                <a:solidFill>
-                  <a:srgbClr val="1F2A37"/>
-                </a:solidFill>
-                <a:latin typeface="Calibri" pitchFamily="34" charset="0"/>
-                <a:ea typeface="Calibri" pitchFamily="34" charset="-122"/>
-                <a:cs typeface="Calibri" pitchFamily="34" charset="-120"/>
-              </a:rPr>
-              <a:t>Grau de alcance das metas. Ex.: 95% da meta de cobertura vacinal atingida.</a:t>
-            </a:r>
-            <a:endParaRPr lang="en-US" sz="1100" dirty="0"/>
-          </a:p>
-        </p:txBody>
-      </p:sp>
-      <p:sp>
-        <p:nvSpPr>
-          <p:cNvPr id="11" name="Shape 7"/>
-          <p:cNvSpPr/>
-          <p:nvPr/>
-        </p:nvSpPr>
-        <p:spPr>
-          <a:xfrm>
-            <a:off x="6001512" y="1234440"/>
-            <a:ext cx="2456688" cy="1920240"/>
-          </a:xfrm>
-          <a:prstGeom prst="roundRect">
-            <a:avLst>
-              <a:gd name="adj" fmla="val 2857"/>
-            </a:avLst>
-          </a:prstGeom>
-          <a:solidFill>
-            <a:srgbClr val="FFFFFF"/>
-          </a:solidFill>
-          <a:ln w="12700">
-            <a:solidFill>
-              <a:srgbClr val="DCD5C1"/>
-            </a:solidFill>
-            <a:prstDash val="solid"/>
-          </a:ln>
-        </p:spPr>
-      </p:sp>
-      <p:sp>
-        <p:nvSpPr>
-          <p:cNvPr id="12" name="Shape 8"/>
-          <p:cNvSpPr/>
-          <p:nvPr/>
-        </p:nvSpPr>
-        <p:spPr>
-          <a:xfrm>
-            <a:off x="6138672" y="1389888"/>
-            <a:ext cx="457200" cy="457200"/>
-          </a:xfrm>
-          <a:prstGeom prst="roundRect">
-            <a:avLst>
-              <a:gd name="adj" fmla="val 16000"/>
-            </a:avLst>
-          </a:prstGeom>
-          <a:solidFill>
-            <a:srgbClr val="13294B"/>
-          </a:solidFill>
-          <a:ln/>
-        </p:spPr>
-      </p:sp>
-      <p:pic>
-        <p:nvPicPr>
-          <p:cNvPr id="13" name="Image 2" descr="/tmp/claude-0/-home-user-zero-claude/d7e33190-c541-582c-a7cc-1156817732ce/scratchpad/deck/assets/icon_FaHeartbeat.png">    </p:cNvPr>
-          <p:cNvPicPr>
-            <a:picLocks noChangeAspect="1"/>
-          </p:cNvPicPr>
-          <p:nvPr/>
-        </p:nvPicPr>
-        <p:blipFill>
-          <a:blip r:embed="rId4"/>
-          <a:stretch>
-            <a:fillRect/>
-          </a:stretch>
-        </p:blipFill>
-        <p:spPr>
-          <a:xfrm>
-            <a:off x="6239256" y="1490472"/>
-            <a:ext cx="256032" cy="256032"/>
-          </a:xfrm>
-          <a:prstGeom prst="rect">
-            <a:avLst/>
-          </a:prstGeom>
-        </p:spPr>
-      </p:pic>
-      <p:sp>
-        <p:nvSpPr>
-          <p:cNvPr id="14" name="Text 9"/>
-          <p:cNvSpPr txBox="1"/>
-          <p:nvPr/>
-        </p:nvSpPr>
-        <p:spPr>
-          <a:xfrm>
-            <a:off x="6687312" y="1307592"/>
-            <a:ext cx="1679448" cy="1773936"/>
-          </a:xfrm>
-          <a:prstGeom prst="rect">
-            <a:avLst/>
-          </a:prstGeom>
-          <a:noFill/>
-          <a:ln/>
-        </p:spPr>
-        <p:txBody>
-          <a:bodyPr wrap="square" lIns="38100" tIns="38100" rIns="38100" bIns="38100" rtlCol="0" anchor="t"/>
-          <a:lstStyle/>
-          <a:p>
-            <a:pPr algn="l" indent="0" marL="0">
-              <a:lnSpc>
-                <a:spcPct val="100000"/>
-              </a:lnSpc>
-              <a:spcAft>
-                <a:spcPts val="200"/>
-              </a:spcAft>
-              <a:buNone/>
-            </a:pPr>
-            <a:r>
-              <a:rPr lang="en-US" sz="1100" b="1" dirty="0">
-                <a:solidFill>
-                  <a:srgbClr val="2A8C85"/>
-                </a:solidFill>
-                <a:latin typeface="Calibri" pitchFamily="34" charset="0"/>
-                <a:ea typeface="Calibri" pitchFamily="34" charset="-122"/>
-                <a:cs typeface="Calibri" pitchFamily="34" charset="-120"/>
-              </a:rPr>
-              <a:t>IMPACTO</a:t>
-            </a:r>
-            <a:endParaRPr lang="en-US" sz="1100" dirty="0"/>
-          </a:p>
-          <a:p>
-            <a:pPr algn="l" indent="0" marL="0">
-              <a:lnSpc>
-                <a:spcPct val="100000"/>
-              </a:lnSpc>
-              <a:spcAft>
-                <a:spcPts val="300"/>
-              </a:spcAft>
-              <a:buNone/>
-            </a:pPr>
-            <a:r>
-              <a:rPr lang="en-US" sz="1600" b="1" dirty="0">
-                <a:solidFill>
-                  <a:srgbClr val="13294B"/>
-                </a:solidFill>
-                <a:latin typeface="Calibri" pitchFamily="34" charset="0"/>
-                <a:ea typeface="Calibri" pitchFamily="34" charset="-122"/>
-                <a:cs typeface="Calibri" pitchFamily="34" charset="-120"/>
-              </a:rPr>
-              <a:t>Efetividade</a:t>
-            </a:r>
-            <a:endParaRPr lang="en-US" sz="1100" dirty="0"/>
-          </a:p>
-          <a:p>
-            <a:pPr algn="l" indent="0" marL="0">
-              <a:lnSpc>
-                <a:spcPct val="100000"/>
-              </a:lnSpc>
-              <a:buNone/>
-            </a:pPr>
-            <a:r>
-              <a:rPr lang="en-US" sz="1350" dirty="0">
-                <a:solidFill>
-                  <a:srgbClr val="1F2A37"/>
-                </a:solidFill>
-                <a:latin typeface="Calibri" pitchFamily="34" charset="0"/>
-                <a:ea typeface="Calibri" pitchFamily="34" charset="-122"/>
-                <a:cs typeface="Calibri" pitchFamily="34" charset="-120"/>
-              </a:rPr>
-              <a:t>Mudança na vida da população. Ex.: queda das internações por doenças evitáveis.</a:t>
-            </a:r>
-            <a:endParaRPr lang="en-US" sz="1100" dirty="0"/>
-          </a:p>
-        </p:txBody>
-      </p:sp>
-      <p:sp>
-        <p:nvSpPr>
-          <p:cNvPr id="15" name="Text 10"/>
+          <a:bodyPr wrap="square" lIns="0" tIns="0" rIns="0" bIns="0" rtlCol="0" anchor="ctr"/>
+          <a:lstStyle/>
+          <a:p>
+            <a:pPr algn="ctr" indent="0" marL="0">
+              <a:lnSpc>
+                <a:spcPct val="100000"/>
+              </a:lnSpc>
+              <a:buNone/>
+            </a:pPr>
+            <a:r>
+              <a:rPr lang="en-US" sz="1400" dirty="0">
+                <a:solidFill>
+                  <a:srgbClr val="5B6770"/>
+                </a:solidFill>
+                <a:latin typeface="Calibri" pitchFamily="34" charset="0"/>
+                <a:ea typeface="Calibri" pitchFamily="34" charset="-122"/>
+                <a:cs typeface="Calibri" pitchFamily="34" charset="-120"/>
+              </a:rPr>
+              <a:t>Exemplo: um programa de vacinação</a:t>
+            </a:r>
+            <a:endParaRPr lang="en-US" sz="1400" dirty="0"/>
+          </a:p>
+        </p:txBody>
+      </p:sp>
+      <p:graphicFrame>
+        <p:nvGraphicFramePr>
+          <p:cNvPr id="6" name="Table 0"/>
+          <p:cNvGraphicFramePr>
+            <a:graphicFrameLocks noGrp="1"/>
+          </p:cNvGraphicFramePr>
+          <p:nvPr>
+            <p:extLst>
+              <p:ext uri="{D42A27DB-BD31-4B8C-83A1-F6EECF244321}">
+                <p14:modId xmlns:p14="http://schemas.microsoft.com/office/powerpoint/2010/main" val="1579011935"/>
+              </p:ext>
+            </p:extLst>
+          </p:nvPr>
+        </p:nvGraphicFramePr>
+        <p:xfrm>
+          <a:off x="685800" y="1280160"/>
+          <a:ext cx="7772400" cy="914400"/>
+        </p:xfrm>
+        <a:graphic>
+          <a:graphicData uri="http://schemas.openxmlformats.org/drawingml/2006/table">
+            <a:tbl>
+              <a:tblPr/>
+              <a:tblGrid>
+                <a:gridCol w="1737360"/>
+                <a:gridCol w="3017520"/>
+                <a:gridCol w="3017520"/>
+              </a:tblGrid>
+              <a:tr h="0">
+                <a:tc>
+                  <a:txBody>
+                    <a:bodyPr/>
+                    <a:lstStyle/>
+                    <a:p>
+                      <a:pPr indent="0" marL="0">
+                        <a:buNone/>
+                      </a:pPr>
+                      <a:r>
+                        <a:rPr lang="en-US" sz="1400" b="1" dirty="0">
+                          <a:solidFill>
+                            <a:srgbClr val="FFFFFF"/>
+                          </a:solidFill>
+                          <a:latin typeface="Calibri" pitchFamily="34" charset="0"/>
+                          <a:ea typeface="Calibri" pitchFamily="34" charset="-122"/>
+                          <a:cs typeface="Calibri" pitchFamily="34" charset="-120"/>
+                        </a:rPr>
+                        <a:t>Conceito</a:t>
+                      </a:r>
+                      <a:endParaRPr lang="en-US" sz="1400" dirty="0">
+                        <a:latin typeface="Calibri" charset="0"/>
+                        <a:ea typeface="Calibri" charset="0"/>
+                        <a:cs typeface="Calibri" charset="0"/>
+                      </a:endParaRPr>
+                    </a:p>
+                  </a:txBody>
+                  <a:tcPr marL="50800" marR="50800" marT="50800" marB="50800" anchor="ctr">
+                    <a:lnL w="9525" cap="flat" cmpd="sng" algn="ctr">
+                      <a:solidFill>
+                        <a:srgbClr val="DCD5C1"/>
+                      </a:solidFill>
+                      <a:prstDash val="solid"/>
+                      <a:round/>
+                      <a:headEnd type="none" w="med" len="med"/>
+                      <a:tailEnd type="none" w="med" len="med"/>
+                    </a:lnL>
+                    <a:lnR w="9525" cap="flat" cmpd="sng" algn="ctr">
+                      <a:solidFill>
+                        <a:srgbClr val="DCD5C1"/>
+                      </a:solidFill>
+                      <a:prstDash val="solid"/>
+                      <a:round/>
+                      <a:headEnd type="none" w="med" len="med"/>
+                      <a:tailEnd type="none" w="med" len="med"/>
+                    </a:lnR>
+                    <a:lnT w="9525" cap="flat" cmpd="sng" algn="ctr">
+                      <a:solidFill>
+                        <a:srgbClr val="DCD5C1"/>
+                      </a:solidFill>
+                      <a:prstDash val="solid"/>
+                      <a:round/>
+                      <a:headEnd type="none" w="med" len="med"/>
+                      <a:tailEnd type="none" w="med" len="med"/>
+                    </a:lnT>
+                    <a:lnB w="9525" cap="flat" cmpd="sng" algn="ctr">
+                      <a:solidFill>
+                        <a:srgbClr val="DCD5C1"/>
+                      </a:solidFill>
+                      <a:prstDash val="solid"/>
+                      <a:round/>
+                      <a:headEnd type="none" w="med" len="med"/>
+                      <a:tailEnd type="none" w="med" len="med"/>
+                    </a:lnB>
+                    <a:solidFill>
+                      <a:srgbClr val="13294B"/>
+                    </a:solidFill>
+                  </a:tcPr>
+                </a:tc>
+                <a:tc>
+                  <a:txBody>
+                    <a:bodyPr/>
+                    <a:lstStyle/>
+                    <a:p>
+                      <a:pPr indent="0" marL="0">
+                        <a:buNone/>
+                      </a:pPr>
+                      <a:r>
+                        <a:rPr lang="en-US" sz="1400" b="1" dirty="0">
+                          <a:solidFill>
+                            <a:srgbClr val="FFFFFF"/>
+                          </a:solidFill>
+                          <a:latin typeface="Calibri" pitchFamily="34" charset="0"/>
+                          <a:ea typeface="Calibri" pitchFamily="34" charset="-122"/>
+                          <a:cs typeface="Calibri" pitchFamily="34" charset="-120"/>
+                        </a:rPr>
+                        <a:t>O que mede</a:t>
+                      </a:r>
+                      <a:endParaRPr lang="en-US" sz="1400" dirty="0">
+                        <a:latin typeface="Calibri" charset="0"/>
+                        <a:ea typeface="Calibri" charset="0"/>
+                        <a:cs typeface="Calibri" charset="0"/>
+                      </a:endParaRPr>
+                    </a:p>
+                  </a:txBody>
+                  <a:tcPr marL="50800" marR="50800" marT="50800" marB="50800" anchor="ctr">
+                    <a:lnL w="9525" cap="flat" cmpd="sng" algn="ctr">
+                      <a:solidFill>
+                        <a:srgbClr val="DCD5C1"/>
+                      </a:solidFill>
+                      <a:prstDash val="solid"/>
+                      <a:round/>
+                      <a:headEnd type="none" w="med" len="med"/>
+                      <a:tailEnd type="none" w="med" len="med"/>
+                    </a:lnL>
+                    <a:lnR w="9525" cap="flat" cmpd="sng" algn="ctr">
+                      <a:solidFill>
+                        <a:srgbClr val="DCD5C1"/>
+                      </a:solidFill>
+                      <a:prstDash val="solid"/>
+                      <a:round/>
+                      <a:headEnd type="none" w="med" len="med"/>
+                      <a:tailEnd type="none" w="med" len="med"/>
+                    </a:lnR>
+                    <a:lnT w="9525" cap="flat" cmpd="sng" algn="ctr">
+                      <a:solidFill>
+                        <a:srgbClr val="DCD5C1"/>
+                      </a:solidFill>
+                      <a:prstDash val="solid"/>
+                      <a:round/>
+                      <a:headEnd type="none" w="med" len="med"/>
+                      <a:tailEnd type="none" w="med" len="med"/>
+                    </a:lnT>
+                    <a:lnB w="9525" cap="flat" cmpd="sng" algn="ctr">
+                      <a:solidFill>
+                        <a:srgbClr val="DCD5C1"/>
+                      </a:solidFill>
+                      <a:prstDash val="solid"/>
+                      <a:round/>
+                      <a:headEnd type="none" w="med" len="med"/>
+                      <a:tailEnd type="none" w="med" len="med"/>
+                    </a:lnB>
+                    <a:solidFill>
+                      <a:srgbClr val="13294B"/>
+                    </a:solidFill>
+                  </a:tcPr>
+                </a:tc>
+                <a:tc>
+                  <a:txBody>
+                    <a:bodyPr/>
+                    <a:lstStyle/>
+                    <a:p>
+                      <a:pPr indent="0" marL="0">
+                        <a:buNone/>
+                      </a:pPr>
+                      <a:r>
+                        <a:rPr lang="en-US" sz="1400" b="1" dirty="0">
+                          <a:solidFill>
+                            <a:srgbClr val="FFFFFF"/>
+                          </a:solidFill>
+                          <a:latin typeface="Calibri" pitchFamily="34" charset="0"/>
+                          <a:ea typeface="Calibri" pitchFamily="34" charset="-122"/>
+                          <a:cs typeface="Calibri" pitchFamily="34" charset="-120"/>
+                        </a:rPr>
+                        <a:t>Exemplo (programa de vacinação)</a:t>
+                      </a:r>
+                      <a:endParaRPr lang="en-US" sz="1400" dirty="0">
+                        <a:latin typeface="Calibri" charset="0"/>
+                        <a:ea typeface="Calibri" charset="0"/>
+                        <a:cs typeface="Calibri" charset="0"/>
+                      </a:endParaRPr>
+                    </a:p>
+                  </a:txBody>
+                  <a:tcPr marL="50800" marR="50800" marT="50800" marB="50800" anchor="ctr">
+                    <a:lnL w="9525" cap="flat" cmpd="sng" algn="ctr">
+                      <a:solidFill>
+                        <a:srgbClr val="DCD5C1"/>
+                      </a:solidFill>
+                      <a:prstDash val="solid"/>
+                      <a:round/>
+                      <a:headEnd type="none" w="med" len="med"/>
+                      <a:tailEnd type="none" w="med" len="med"/>
+                    </a:lnL>
+                    <a:lnR w="9525" cap="flat" cmpd="sng" algn="ctr">
+                      <a:solidFill>
+                        <a:srgbClr val="DCD5C1"/>
+                      </a:solidFill>
+                      <a:prstDash val="solid"/>
+                      <a:round/>
+                      <a:headEnd type="none" w="med" len="med"/>
+                      <a:tailEnd type="none" w="med" len="med"/>
+                    </a:lnR>
+                    <a:lnT w="9525" cap="flat" cmpd="sng" algn="ctr">
+                      <a:solidFill>
+                        <a:srgbClr val="DCD5C1"/>
+                      </a:solidFill>
+                      <a:prstDash val="solid"/>
+                      <a:round/>
+                      <a:headEnd type="none" w="med" len="med"/>
+                      <a:tailEnd type="none" w="med" len="med"/>
+                    </a:lnT>
+                    <a:lnB w="9525" cap="flat" cmpd="sng" algn="ctr">
+                      <a:solidFill>
+                        <a:srgbClr val="DCD5C1"/>
+                      </a:solidFill>
+                      <a:prstDash val="solid"/>
+                      <a:round/>
+                      <a:headEnd type="none" w="med" len="med"/>
+                      <a:tailEnd type="none" w="med" len="med"/>
+                    </a:lnB>
+                    <a:solidFill>
+                      <a:srgbClr val="13294B"/>
+                    </a:solidFill>
+                  </a:tcPr>
+                </a:tc>
+              </a:tr>
+              <a:tr h="0">
+                <a:tc>
+                  <a:txBody>
+                    <a:bodyPr/>
+                    <a:lstStyle/>
+                    <a:p>
+                      <a:pPr indent="0" marL="0">
+                        <a:buNone/>
+                      </a:pPr>
+                      <a:r>
+                        <a:rPr lang="en-US" sz="1400" b="1" dirty="0">
+                          <a:solidFill>
+                            <a:srgbClr val="1F2A37"/>
+                          </a:solidFill>
+                          <a:latin typeface="Calibri" pitchFamily="34" charset="0"/>
+                          <a:ea typeface="Calibri" pitchFamily="34" charset="-122"/>
+                          <a:cs typeface="Calibri" pitchFamily="34" charset="-120"/>
+                        </a:rPr>
+                        <a:t>Eficiência</a:t>
+                      </a:r>
+                      <a:endParaRPr lang="en-US" sz="1400" dirty="0">
+                        <a:latin typeface="Calibri" charset="0"/>
+                        <a:ea typeface="Calibri" charset="0"/>
+                        <a:cs typeface="Calibri" charset="0"/>
+                      </a:endParaRPr>
+                    </a:p>
+                  </a:txBody>
+                  <a:tcPr marL="50800" marR="50800" marT="50800" marB="50800" anchor="ctr">
+                    <a:lnL w="9525" cap="flat" cmpd="sng" algn="ctr">
+                      <a:solidFill>
+                        <a:srgbClr val="DCD5C1"/>
+                      </a:solidFill>
+                      <a:prstDash val="solid"/>
+                      <a:round/>
+                      <a:headEnd type="none" w="med" len="med"/>
+                      <a:tailEnd type="none" w="med" len="med"/>
+                    </a:lnL>
+                    <a:lnR w="9525" cap="flat" cmpd="sng" algn="ctr">
+                      <a:solidFill>
+                        <a:srgbClr val="DCD5C1"/>
+                      </a:solidFill>
+                      <a:prstDash val="solid"/>
+                      <a:round/>
+                      <a:headEnd type="none" w="med" len="med"/>
+                      <a:tailEnd type="none" w="med" len="med"/>
+                    </a:lnR>
+                    <a:lnT w="9525" cap="flat" cmpd="sng" algn="ctr">
+                      <a:solidFill>
+                        <a:srgbClr val="DCD5C1"/>
+                      </a:solidFill>
+                      <a:prstDash val="solid"/>
+                      <a:round/>
+                      <a:headEnd type="none" w="med" len="med"/>
+                      <a:tailEnd type="none" w="med" len="med"/>
+                    </a:lnT>
+                    <a:lnB w="9525" cap="flat" cmpd="sng" algn="ctr">
+                      <a:solidFill>
+                        <a:srgbClr val="DCD5C1"/>
+                      </a:solidFill>
+                      <a:prstDash val="solid"/>
+                      <a:round/>
+                      <a:headEnd type="none" w="med" len="med"/>
+                      <a:tailEnd type="none" w="med" len="med"/>
+                    </a:lnB>
+                    <a:solidFill>
+                      <a:srgbClr val="FFFFFF"/>
+                    </a:solidFill>
+                  </a:tcPr>
+                </a:tc>
+                <a:tc>
+                  <a:txBody>
+                    <a:bodyPr/>
+                    <a:lstStyle/>
+                    <a:p>
+                      <a:pPr indent="0" marL="0">
+                        <a:buNone/>
+                      </a:pPr>
+                      <a:r>
+                        <a:rPr lang="en-US" sz="1400" dirty="0">
+                          <a:solidFill>
+                            <a:srgbClr val="1F2A37"/>
+                          </a:solidFill>
+                          <a:latin typeface="Calibri" pitchFamily="34" charset="0"/>
+                          <a:ea typeface="Calibri" pitchFamily="34" charset="-122"/>
+                          <a:cs typeface="Calibri" pitchFamily="34" charset="-120"/>
+                        </a:rPr>
+                        <a:t>Relação entre resultados e custos</a:t>
+                      </a:r>
+                      <a:endParaRPr lang="en-US" sz="1400" dirty="0">
+                        <a:latin typeface="Calibri" charset="0"/>
+                        <a:ea typeface="Calibri" charset="0"/>
+                        <a:cs typeface="Calibri" charset="0"/>
+                      </a:endParaRPr>
+                    </a:p>
+                  </a:txBody>
+                  <a:tcPr marL="50800" marR="50800" marT="50800" marB="50800" anchor="ctr">
+                    <a:lnL w="9525" cap="flat" cmpd="sng" algn="ctr">
+                      <a:solidFill>
+                        <a:srgbClr val="DCD5C1"/>
+                      </a:solidFill>
+                      <a:prstDash val="solid"/>
+                      <a:round/>
+                      <a:headEnd type="none" w="med" len="med"/>
+                      <a:tailEnd type="none" w="med" len="med"/>
+                    </a:lnL>
+                    <a:lnR w="9525" cap="flat" cmpd="sng" algn="ctr">
+                      <a:solidFill>
+                        <a:srgbClr val="DCD5C1"/>
+                      </a:solidFill>
+                      <a:prstDash val="solid"/>
+                      <a:round/>
+                      <a:headEnd type="none" w="med" len="med"/>
+                      <a:tailEnd type="none" w="med" len="med"/>
+                    </a:lnR>
+                    <a:lnT w="9525" cap="flat" cmpd="sng" algn="ctr">
+                      <a:solidFill>
+                        <a:srgbClr val="DCD5C1"/>
+                      </a:solidFill>
+                      <a:prstDash val="solid"/>
+                      <a:round/>
+                      <a:headEnd type="none" w="med" len="med"/>
+                      <a:tailEnd type="none" w="med" len="med"/>
+                    </a:lnT>
+                    <a:lnB w="9525" cap="flat" cmpd="sng" algn="ctr">
+                      <a:solidFill>
+                        <a:srgbClr val="DCD5C1"/>
+                      </a:solidFill>
+                      <a:prstDash val="solid"/>
+                      <a:round/>
+                      <a:headEnd type="none" w="med" len="med"/>
+                      <a:tailEnd type="none" w="med" len="med"/>
+                    </a:lnB>
+                    <a:solidFill>
+                      <a:srgbClr val="FFFFFF"/>
+                    </a:solidFill>
+                  </a:tcPr>
+                </a:tc>
+                <a:tc>
+                  <a:txBody>
+                    <a:bodyPr/>
+                    <a:lstStyle/>
+                    <a:p>
+                      <a:pPr indent="0" marL="0">
+                        <a:buNone/>
+                      </a:pPr>
+                      <a:r>
+                        <a:rPr lang="en-US" sz="1400" dirty="0">
+                          <a:solidFill>
+                            <a:srgbClr val="1F2A37"/>
+                          </a:solidFill>
+                          <a:latin typeface="Calibri" pitchFamily="34" charset="0"/>
+                          <a:ea typeface="Calibri" pitchFamily="34" charset="-122"/>
+                          <a:cs typeface="Calibri" pitchFamily="34" charset="-120"/>
+                        </a:rPr>
+                        <a:t>Custo por dose aplicada</a:t>
+                      </a:r>
+                      <a:endParaRPr lang="en-US" sz="1400" dirty="0">
+                        <a:latin typeface="Calibri" charset="0"/>
+                        <a:ea typeface="Calibri" charset="0"/>
+                        <a:cs typeface="Calibri" charset="0"/>
+                      </a:endParaRPr>
+                    </a:p>
+                  </a:txBody>
+                  <a:tcPr marL="50800" marR="50800" marT="50800" marB="50800" anchor="ctr">
+                    <a:lnL w="9525" cap="flat" cmpd="sng" algn="ctr">
+                      <a:solidFill>
+                        <a:srgbClr val="DCD5C1"/>
+                      </a:solidFill>
+                      <a:prstDash val="solid"/>
+                      <a:round/>
+                      <a:headEnd type="none" w="med" len="med"/>
+                      <a:tailEnd type="none" w="med" len="med"/>
+                    </a:lnL>
+                    <a:lnR w="9525" cap="flat" cmpd="sng" algn="ctr">
+                      <a:solidFill>
+                        <a:srgbClr val="DCD5C1"/>
+                      </a:solidFill>
+                      <a:prstDash val="solid"/>
+                      <a:round/>
+                      <a:headEnd type="none" w="med" len="med"/>
+                      <a:tailEnd type="none" w="med" len="med"/>
+                    </a:lnR>
+                    <a:lnT w="9525" cap="flat" cmpd="sng" algn="ctr">
+                      <a:solidFill>
+                        <a:srgbClr val="DCD5C1"/>
+                      </a:solidFill>
+                      <a:prstDash val="solid"/>
+                      <a:round/>
+                      <a:headEnd type="none" w="med" len="med"/>
+                      <a:tailEnd type="none" w="med" len="med"/>
+                    </a:lnT>
+                    <a:lnB w="9525" cap="flat" cmpd="sng" algn="ctr">
+                      <a:solidFill>
+                        <a:srgbClr val="DCD5C1"/>
+                      </a:solidFill>
+                      <a:prstDash val="solid"/>
+                      <a:round/>
+                      <a:headEnd type="none" w="med" len="med"/>
+                      <a:tailEnd type="none" w="med" len="med"/>
+                    </a:lnB>
+                    <a:solidFill>
+                      <a:srgbClr val="FFFFFF"/>
+                    </a:solidFill>
+                  </a:tcPr>
+                </a:tc>
+              </a:tr>
+              <a:tr h="0">
+                <a:tc>
+                  <a:txBody>
+                    <a:bodyPr/>
+                    <a:lstStyle/>
+                    <a:p>
+                      <a:pPr indent="0" marL="0">
+                        <a:buNone/>
+                      </a:pPr>
+                      <a:r>
+                        <a:rPr lang="en-US" sz="1400" b="1" dirty="0">
+                          <a:solidFill>
+                            <a:srgbClr val="1F2A37"/>
+                          </a:solidFill>
+                          <a:latin typeface="Calibri" pitchFamily="34" charset="0"/>
+                          <a:ea typeface="Calibri" pitchFamily="34" charset="-122"/>
+                          <a:cs typeface="Calibri" pitchFamily="34" charset="-120"/>
+                        </a:rPr>
+                        <a:t>Eficácia</a:t>
+                      </a:r>
+                      <a:endParaRPr lang="en-US" sz="1400" dirty="0">
+                        <a:latin typeface="Calibri" charset="0"/>
+                        <a:ea typeface="Calibri" charset="0"/>
+                        <a:cs typeface="Calibri" charset="0"/>
+                      </a:endParaRPr>
+                    </a:p>
+                  </a:txBody>
+                  <a:tcPr marL="50800" marR="50800" marT="50800" marB="50800" anchor="ctr">
+                    <a:lnL w="9525" cap="flat" cmpd="sng" algn="ctr">
+                      <a:solidFill>
+                        <a:srgbClr val="DCD5C1"/>
+                      </a:solidFill>
+                      <a:prstDash val="solid"/>
+                      <a:round/>
+                      <a:headEnd type="none" w="med" len="med"/>
+                      <a:tailEnd type="none" w="med" len="med"/>
+                    </a:lnL>
+                    <a:lnR w="9525" cap="flat" cmpd="sng" algn="ctr">
+                      <a:solidFill>
+                        <a:srgbClr val="DCD5C1"/>
+                      </a:solidFill>
+                      <a:prstDash val="solid"/>
+                      <a:round/>
+                      <a:headEnd type="none" w="med" len="med"/>
+                      <a:tailEnd type="none" w="med" len="med"/>
+                    </a:lnR>
+                    <a:lnT w="9525" cap="flat" cmpd="sng" algn="ctr">
+                      <a:solidFill>
+                        <a:srgbClr val="DCD5C1"/>
+                      </a:solidFill>
+                      <a:prstDash val="solid"/>
+                      <a:round/>
+                      <a:headEnd type="none" w="med" len="med"/>
+                      <a:tailEnd type="none" w="med" len="med"/>
+                    </a:lnT>
+                    <a:lnB w="9525" cap="flat" cmpd="sng" algn="ctr">
+                      <a:solidFill>
+                        <a:srgbClr val="DCD5C1"/>
+                      </a:solidFill>
+                      <a:prstDash val="solid"/>
+                      <a:round/>
+                      <a:headEnd type="none" w="med" len="med"/>
+                      <a:tailEnd type="none" w="med" len="med"/>
+                    </a:lnB>
+                    <a:solidFill>
+                      <a:srgbClr val="F4F7F8"/>
+                    </a:solidFill>
+                  </a:tcPr>
+                </a:tc>
+                <a:tc>
+                  <a:txBody>
+                    <a:bodyPr/>
+                    <a:lstStyle/>
+                    <a:p>
+                      <a:pPr indent="0" marL="0">
+                        <a:buNone/>
+                      </a:pPr>
+                      <a:r>
+                        <a:rPr lang="en-US" sz="1400" dirty="0">
+                          <a:solidFill>
+                            <a:srgbClr val="1F2A37"/>
+                          </a:solidFill>
+                          <a:latin typeface="Calibri" pitchFamily="34" charset="0"/>
+                          <a:ea typeface="Calibri" pitchFamily="34" charset="-122"/>
+                          <a:cs typeface="Calibri" pitchFamily="34" charset="-120"/>
+                        </a:rPr>
+                        <a:t>Grau de alcance das metas</a:t>
+                      </a:r>
+                      <a:endParaRPr lang="en-US" sz="1400" dirty="0">
+                        <a:latin typeface="Calibri" charset="0"/>
+                        <a:ea typeface="Calibri" charset="0"/>
+                        <a:cs typeface="Calibri" charset="0"/>
+                      </a:endParaRPr>
+                    </a:p>
+                  </a:txBody>
+                  <a:tcPr marL="50800" marR="50800" marT="50800" marB="50800" anchor="ctr">
+                    <a:lnL w="9525" cap="flat" cmpd="sng" algn="ctr">
+                      <a:solidFill>
+                        <a:srgbClr val="DCD5C1"/>
+                      </a:solidFill>
+                      <a:prstDash val="solid"/>
+                      <a:round/>
+                      <a:headEnd type="none" w="med" len="med"/>
+                      <a:tailEnd type="none" w="med" len="med"/>
+                    </a:lnL>
+                    <a:lnR w="9525" cap="flat" cmpd="sng" algn="ctr">
+                      <a:solidFill>
+                        <a:srgbClr val="DCD5C1"/>
+                      </a:solidFill>
+                      <a:prstDash val="solid"/>
+                      <a:round/>
+                      <a:headEnd type="none" w="med" len="med"/>
+                      <a:tailEnd type="none" w="med" len="med"/>
+                    </a:lnR>
+                    <a:lnT w="9525" cap="flat" cmpd="sng" algn="ctr">
+                      <a:solidFill>
+                        <a:srgbClr val="DCD5C1"/>
+                      </a:solidFill>
+                      <a:prstDash val="solid"/>
+                      <a:round/>
+                      <a:headEnd type="none" w="med" len="med"/>
+                      <a:tailEnd type="none" w="med" len="med"/>
+                    </a:lnT>
+                    <a:lnB w="9525" cap="flat" cmpd="sng" algn="ctr">
+                      <a:solidFill>
+                        <a:srgbClr val="DCD5C1"/>
+                      </a:solidFill>
+                      <a:prstDash val="solid"/>
+                      <a:round/>
+                      <a:headEnd type="none" w="med" len="med"/>
+                      <a:tailEnd type="none" w="med" len="med"/>
+                    </a:lnB>
+                    <a:solidFill>
+                      <a:srgbClr val="F4F7F8"/>
+                    </a:solidFill>
+                  </a:tcPr>
+                </a:tc>
+                <a:tc>
+                  <a:txBody>
+                    <a:bodyPr/>
+                    <a:lstStyle/>
+                    <a:p>
+                      <a:pPr indent="0" marL="0">
+                        <a:buNone/>
+                      </a:pPr>
+                      <a:r>
+                        <a:rPr lang="en-US" sz="1400" dirty="0">
+                          <a:solidFill>
+                            <a:srgbClr val="1F2A37"/>
+                          </a:solidFill>
+                          <a:latin typeface="Calibri" pitchFamily="34" charset="0"/>
+                          <a:ea typeface="Calibri" pitchFamily="34" charset="-122"/>
+                          <a:cs typeface="Calibri" pitchFamily="34" charset="-120"/>
+                        </a:rPr>
+                        <a:t>95% da meta de cobertura vacinal atingida</a:t>
+                      </a:r>
+                      <a:endParaRPr lang="en-US" sz="1400" dirty="0">
+                        <a:latin typeface="Calibri" charset="0"/>
+                        <a:ea typeface="Calibri" charset="0"/>
+                        <a:cs typeface="Calibri" charset="0"/>
+                      </a:endParaRPr>
+                    </a:p>
+                  </a:txBody>
+                  <a:tcPr marL="50800" marR="50800" marT="50800" marB="50800" anchor="ctr">
+                    <a:lnL w="9525" cap="flat" cmpd="sng" algn="ctr">
+                      <a:solidFill>
+                        <a:srgbClr val="DCD5C1"/>
+                      </a:solidFill>
+                      <a:prstDash val="solid"/>
+                      <a:round/>
+                      <a:headEnd type="none" w="med" len="med"/>
+                      <a:tailEnd type="none" w="med" len="med"/>
+                    </a:lnL>
+                    <a:lnR w="9525" cap="flat" cmpd="sng" algn="ctr">
+                      <a:solidFill>
+                        <a:srgbClr val="DCD5C1"/>
+                      </a:solidFill>
+                      <a:prstDash val="solid"/>
+                      <a:round/>
+                      <a:headEnd type="none" w="med" len="med"/>
+                      <a:tailEnd type="none" w="med" len="med"/>
+                    </a:lnR>
+                    <a:lnT w="9525" cap="flat" cmpd="sng" algn="ctr">
+                      <a:solidFill>
+                        <a:srgbClr val="DCD5C1"/>
+                      </a:solidFill>
+                      <a:prstDash val="solid"/>
+                      <a:round/>
+                      <a:headEnd type="none" w="med" len="med"/>
+                      <a:tailEnd type="none" w="med" len="med"/>
+                    </a:lnT>
+                    <a:lnB w="9525" cap="flat" cmpd="sng" algn="ctr">
+                      <a:solidFill>
+                        <a:srgbClr val="DCD5C1"/>
+                      </a:solidFill>
+                      <a:prstDash val="solid"/>
+                      <a:round/>
+                      <a:headEnd type="none" w="med" len="med"/>
+                      <a:tailEnd type="none" w="med" len="med"/>
+                    </a:lnB>
+                    <a:solidFill>
+                      <a:srgbClr val="F4F7F8"/>
+                    </a:solidFill>
+                  </a:tcPr>
+                </a:tc>
+              </a:tr>
+              <a:tr h="0">
+                <a:tc>
+                  <a:txBody>
+                    <a:bodyPr/>
+                    <a:lstStyle/>
+                    <a:p>
+                      <a:pPr indent="0" marL="0">
+                        <a:buNone/>
+                      </a:pPr>
+                      <a:r>
+                        <a:rPr lang="en-US" sz="1400" b="1" dirty="0">
+                          <a:solidFill>
+                            <a:srgbClr val="1F2A37"/>
+                          </a:solidFill>
+                          <a:latin typeface="Calibri" pitchFamily="34" charset="0"/>
+                          <a:ea typeface="Calibri" pitchFamily="34" charset="-122"/>
+                          <a:cs typeface="Calibri" pitchFamily="34" charset="-120"/>
+                        </a:rPr>
+                        <a:t>Efetividade</a:t>
+                      </a:r>
+                      <a:endParaRPr lang="en-US" sz="1400" dirty="0">
+                        <a:latin typeface="Calibri" charset="0"/>
+                        <a:ea typeface="Calibri" charset="0"/>
+                        <a:cs typeface="Calibri" charset="0"/>
+                      </a:endParaRPr>
+                    </a:p>
+                  </a:txBody>
+                  <a:tcPr marL="50800" marR="50800" marT="50800" marB="50800" anchor="ctr">
+                    <a:lnL w="9525" cap="flat" cmpd="sng" algn="ctr">
+                      <a:solidFill>
+                        <a:srgbClr val="DCD5C1"/>
+                      </a:solidFill>
+                      <a:prstDash val="solid"/>
+                      <a:round/>
+                      <a:headEnd type="none" w="med" len="med"/>
+                      <a:tailEnd type="none" w="med" len="med"/>
+                    </a:lnL>
+                    <a:lnR w="9525" cap="flat" cmpd="sng" algn="ctr">
+                      <a:solidFill>
+                        <a:srgbClr val="DCD5C1"/>
+                      </a:solidFill>
+                      <a:prstDash val="solid"/>
+                      <a:round/>
+                      <a:headEnd type="none" w="med" len="med"/>
+                      <a:tailEnd type="none" w="med" len="med"/>
+                    </a:lnR>
+                    <a:lnT w="9525" cap="flat" cmpd="sng" algn="ctr">
+                      <a:solidFill>
+                        <a:srgbClr val="DCD5C1"/>
+                      </a:solidFill>
+                      <a:prstDash val="solid"/>
+                      <a:round/>
+                      <a:headEnd type="none" w="med" len="med"/>
+                      <a:tailEnd type="none" w="med" len="med"/>
+                    </a:lnT>
+                    <a:lnB w="9525" cap="flat" cmpd="sng" algn="ctr">
+                      <a:solidFill>
+                        <a:srgbClr val="DCD5C1"/>
+                      </a:solidFill>
+                      <a:prstDash val="solid"/>
+                      <a:round/>
+                      <a:headEnd type="none" w="med" len="med"/>
+                      <a:tailEnd type="none" w="med" len="med"/>
+                    </a:lnB>
+                    <a:solidFill>
+                      <a:srgbClr val="FFFFFF"/>
+                    </a:solidFill>
+                  </a:tcPr>
+                </a:tc>
+                <a:tc>
+                  <a:txBody>
+                    <a:bodyPr/>
+                    <a:lstStyle/>
+                    <a:p>
+                      <a:pPr indent="0" marL="0">
+                        <a:buNone/>
+                      </a:pPr>
+                      <a:r>
+                        <a:rPr lang="en-US" sz="1400" dirty="0">
+                          <a:solidFill>
+                            <a:srgbClr val="1F2A37"/>
+                          </a:solidFill>
+                          <a:latin typeface="Calibri" pitchFamily="34" charset="0"/>
+                          <a:ea typeface="Calibri" pitchFamily="34" charset="-122"/>
+                          <a:cs typeface="Calibri" pitchFamily="34" charset="-120"/>
+                        </a:rPr>
+                        <a:t>Mudança nas condições da população (impacto)</a:t>
+                      </a:r>
+                      <a:endParaRPr lang="en-US" sz="1400" dirty="0">
+                        <a:latin typeface="Calibri" charset="0"/>
+                        <a:ea typeface="Calibri" charset="0"/>
+                        <a:cs typeface="Calibri" charset="0"/>
+                      </a:endParaRPr>
+                    </a:p>
+                  </a:txBody>
+                  <a:tcPr marL="50800" marR="50800" marT="50800" marB="50800" anchor="ctr">
+                    <a:lnL w="9525" cap="flat" cmpd="sng" algn="ctr">
+                      <a:solidFill>
+                        <a:srgbClr val="DCD5C1"/>
+                      </a:solidFill>
+                      <a:prstDash val="solid"/>
+                      <a:round/>
+                      <a:headEnd type="none" w="med" len="med"/>
+                      <a:tailEnd type="none" w="med" len="med"/>
+                    </a:lnL>
+                    <a:lnR w="9525" cap="flat" cmpd="sng" algn="ctr">
+                      <a:solidFill>
+                        <a:srgbClr val="DCD5C1"/>
+                      </a:solidFill>
+                      <a:prstDash val="solid"/>
+                      <a:round/>
+                      <a:headEnd type="none" w="med" len="med"/>
+                      <a:tailEnd type="none" w="med" len="med"/>
+                    </a:lnR>
+                    <a:lnT w="9525" cap="flat" cmpd="sng" algn="ctr">
+                      <a:solidFill>
+                        <a:srgbClr val="DCD5C1"/>
+                      </a:solidFill>
+                      <a:prstDash val="solid"/>
+                      <a:round/>
+                      <a:headEnd type="none" w="med" len="med"/>
+                      <a:tailEnd type="none" w="med" len="med"/>
+                    </a:lnT>
+                    <a:lnB w="9525" cap="flat" cmpd="sng" algn="ctr">
+                      <a:solidFill>
+                        <a:srgbClr val="DCD5C1"/>
+                      </a:solidFill>
+                      <a:prstDash val="solid"/>
+                      <a:round/>
+                      <a:headEnd type="none" w="med" len="med"/>
+                      <a:tailEnd type="none" w="med" len="med"/>
+                    </a:lnB>
+                    <a:solidFill>
+                      <a:srgbClr val="FFFFFF"/>
+                    </a:solidFill>
+                  </a:tcPr>
+                </a:tc>
+                <a:tc>
+                  <a:txBody>
+                    <a:bodyPr/>
+                    <a:lstStyle/>
+                    <a:p>
+                      <a:pPr indent="0" marL="0">
+                        <a:buNone/>
+                      </a:pPr>
+                      <a:r>
+                        <a:rPr lang="en-US" sz="1400" dirty="0">
+                          <a:solidFill>
+                            <a:srgbClr val="1F2A37"/>
+                          </a:solidFill>
+                          <a:latin typeface="Calibri" pitchFamily="34" charset="0"/>
+                          <a:ea typeface="Calibri" pitchFamily="34" charset="-122"/>
+                          <a:cs typeface="Calibri" pitchFamily="34" charset="-120"/>
+                        </a:rPr>
+                        <a:t>Queda das internações por doenças evitáveis</a:t>
+                      </a:r>
+                      <a:endParaRPr lang="en-US" sz="1400" dirty="0">
+                        <a:latin typeface="Calibri" charset="0"/>
+                        <a:ea typeface="Calibri" charset="0"/>
+                        <a:cs typeface="Calibri" charset="0"/>
+                      </a:endParaRPr>
+                    </a:p>
+                  </a:txBody>
+                  <a:tcPr marL="50800" marR="50800" marT="50800" marB="50800" anchor="ctr">
+                    <a:lnL w="9525" cap="flat" cmpd="sng" algn="ctr">
+                      <a:solidFill>
+                        <a:srgbClr val="DCD5C1"/>
+                      </a:solidFill>
+                      <a:prstDash val="solid"/>
+                      <a:round/>
+                      <a:headEnd type="none" w="med" len="med"/>
+                      <a:tailEnd type="none" w="med" len="med"/>
+                    </a:lnL>
+                    <a:lnR w="9525" cap="flat" cmpd="sng" algn="ctr">
+                      <a:solidFill>
+                        <a:srgbClr val="DCD5C1"/>
+                      </a:solidFill>
+                      <a:prstDash val="solid"/>
+                      <a:round/>
+                      <a:headEnd type="none" w="med" len="med"/>
+                      <a:tailEnd type="none" w="med" len="med"/>
+                    </a:lnR>
+                    <a:lnT w="9525" cap="flat" cmpd="sng" algn="ctr">
+                      <a:solidFill>
+                        <a:srgbClr val="DCD5C1"/>
+                      </a:solidFill>
+                      <a:prstDash val="solid"/>
+                      <a:round/>
+                      <a:headEnd type="none" w="med" len="med"/>
+                      <a:tailEnd type="none" w="med" len="med"/>
+                    </a:lnT>
+                    <a:lnB w="9525" cap="flat" cmpd="sng" algn="ctr">
+                      <a:solidFill>
+                        <a:srgbClr val="DCD5C1"/>
+                      </a:solidFill>
+                      <a:prstDash val="solid"/>
+                      <a:round/>
+                      <a:headEnd type="none" w="med" len="med"/>
+                      <a:tailEnd type="none" w="med" len="med"/>
+                    </a:lnB>
+                    <a:solidFill>
+                      <a:srgbClr val="FFFFFF"/>
+                    </a:solidFill>
+                  </a:tcPr>
+                </a:tc>
+              </a:tr>
+            </a:tbl>
+          </a:graphicData>
+        </a:graphic>
+      </p:graphicFrame>
+      <p:sp>
+        <p:nvSpPr>
+          <p:cNvPr id="5" name="Text 2"/>
           <p:cNvSpPr txBox="1"/>
           <p:nvPr/>
         </p:nvSpPr>
@@ -18133,7 +19211,7 @@
       </p:sp>
       <p:sp>
         <p:nvSpPr>
-          <p:cNvPr id="16" name="Text 11"/>
+          <p:cNvPr id="6" name="Text 3"/>
           <p:cNvSpPr txBox="1"/>
           <p:nvPr/>
         </p:nvSpPr>
@@ -18167,7 +19245,7 @@
                 <a:ea typeface="Calibri" pitchFamily="34" charset="-122"/>
                 <a:cs typeface="Calibri" pitchFamily="34" charset="-120"/>
               </a:rPr>
-              <a:t>Indicadores Socioeconômicos · Unidade 2</a:t>
+              <a:t>Indicadores Socioeconômicos · Unidade 2 · Tópico 3 do sumário</a:t>
             </a:r>
             <a:endParaRPr lang="en-US" sz="950" dirty="0"/>
           </a:p>
@@ -18248,7 +19326,7 @@
                 <a:ea typeface="Calibri" pitchFamily="34" charset="-122"/>
                 <a:cs typeface="Calibri" pitchFamily="34" charset="-120"/>
               </a:rPr>
-              <a:t>PARTE 2</a:t>
+              <a:t>PARTE 2 · TÓPICO 4 DO SUMÁRIO</a:t>
             </a:r>
             <a:endParaRPr lang="en-US" sz="1600" dirty="0"/>
           </a:p>
@@ -18374,7 +19452,7 @@
                 <a:ea typeface="Calibri" pitchFamily="34" charset="-122"/>
                 <a:cs typeface="Calibri" pitchFamily="34" charset="-120"/>
               </a:rPr>
-              <a:t>Indicadores Socioeconômicos · Unidade 2</a:t>
+              <a:t>Indicadores Socioeconômicos · Unidade 2 · Tópico 4 do sumário</a:t>
             </a:r>
             <a:endParaRPr lang="en-US" sz="950" dirty="0"/>
           </a:p>
@@ -19003,7 +20081,7 @@
                 <a:ea typeface="Calibri" pitchFamily="34" charset="-122"/>
                 <a:cs typeface="Calibri" pitchFamily="34" charset="-120"/>
               </a:rPr>
-              <a:t>Indicadores Socioeconômicos · Unidade 2</a:t>
+              <a:t>Indicadores Socioeconômicos · Unidade 2 · Tópico 4 do sumário</a:t>
             </a:r>
             <a:endParaRPr lang="en-US" sz="950" dirty="0"/>
           </a:p>
@@ -20599,7 +21677,7 @@
                 <a:ea typeface="Calibri" pitchFamily="34" charset="-122"/>
                 <a:cs typeface="Calibri" pitchFamily="34" charset="-120"/>
               </a:rPr>
-              <a:t>Indicadores Socioeconômicos · Unidade 2</a:t>
+              <a:t>Indicadores Socioeconômicos · Unidade 2 · Tópico 4 do sumário</a:t>
             </a:r>
             <a:endParaRPr lang="en-US" sz="950" dirty="0"/>
           </a:p>
@@ -20672,7 +21750,7 @@
               <a:buNone/>
             </a:pPr>
             <a:r>
-              <a:rPr lang="en-US" sz="2300" b="1" dirty="0">
+              <a:rPr lang="en-US" sz="2600" b="1" dirty="0">
                 <a:solidFill>
                   <a:srgbClr val="13294B"/>
                 </a:solidFill>
@@ -20680,599 +21758,1287 @@
                 <a:ea typeface="Calibri" pitchFamily="34" charset="-122"/>
                 <a:cs typeface="Calibri" pitchFamily="34" charset="-120"/>
               </a:rPr>
-              <a:t>Dimensões de um diagnóstico e exemplos de indicadores</a:t>
-            </a:r>
-            <a:endParaRPr lang="en-US" sz="2300" dirty="0"/>
-          </a:p>
-        </p:txBody>
-      </p:sp>
-      <p:sp>
-        <p:nvSpPr>
-          <p:cNvPr id="3" name="Text 1"/>
-          <p:cNvSpPr txBox="1"/>
-          <p:nvPr/>
-        </p:nvSpPr>
-        <p:spPr>
-          <a:xfrm>
-            <a:off x="685800" y="1188720"/>
-            <a:ext cx="1833372" cy="1298448"/>
-          </a:xfrm>
-          <a:prstGeom prst="roundRect">
-            <a:avLst>
-              <a:gd name="adj" fmla="val 4225"/>
-            </a:avLst>
-          </a:prstGeom>
-          <a:solidFill>
-            <a:srgbClr val="FFFFFF"/>
-          </a:solidFill>
-          <a:ln w="12700">
-            <a:solidFill>
-              <a:srgbClr val="DCD5C1"/>
-            </a:solidFill>
-          </a:ln>
-        </p:spPr>
-        <p:txBody>
-          <a:bodyPr wrap="square" lIns="101600" tIns="101600" rIns="101600" bIns="101600" rtlCol="0" anchor="t"/>
-          <a:lstStyle/>
-          <a:p>
-            <a:pPr algn="l" indent="0" marL="0">
-              <a:lnSpc>
-                <a:spcPct val="100000"/>
-              </a:lnSpc>
-              <a:spcAft>
-                <a:spcPts val="300"/>
-              </a:spcAft>
-              <a:buNone/>
-            </a:pPr>
-            <a:r>
-              <a:rPr lang="en-US" sz="1350" b="1" dirty="0">
-                <a:solidFill>
-                  <a:srgbClr val="13294B"/>
-                </a:solidFill>
-                <a:latin typeface="Calibri" pitchFamily="34" charset="0"/>
-                <a:ea typeface="Calibri" pitchFamily="34" charset="-122"/>
-                <a:cs typeface="Calibri" pitchFamily="34" charset="-120"/>
-              </a:rPr>
-              <a:t>Demografia</a:t>
-            </a:r>
-            <a:endParaRPr lang="en-US" sz="1350" dirty="0"/>
-          </a:p>
-          <a:p>
-            <a:pPr algn="l" indent="0" marL="0">
-              <a:lnSpc>
-                <a:spcPct val="100000"/>
-              </a:lnSpc>
-              <a:buNone/>
-            </a:pPr>
-            <a:r>
-              <a:rPr lang="en-US" sz="1250" dirty="0">
-                <a:solidFill>
-                  <a:srgbClr val="1F2A37"/>
-                </a:solidFill>
-                <a:latin typeface="Calibri" pitchFamily="34" charset="0"/>
-                <a:ea typeface="Calibri" pitchFamily="34" charset="-122"/>
-                <a:cs typeface="Calibri" pitchFamily="34" charset="-120"/>
-              </a:rPr>
-              <a:t>População por idade; taxa de crescimento.</a:t>
-            </a:r>
-            <a:endParaRPr lang="en-US" sz="1350" dirty="0"/>
-          </a:p>
-        </p:txBody>
-      </p:sp>
-      <p:sp>
-        <p:nvSpPr>
-          <p:cNvPr id="4" name="Text 2"/>
-          <p:cNvSpPr txBox="1"/>
-          <p:nvPr/>
-        </p:nvSpPr>
-        <p:spPr>
-          <a:xfrm>
-            <a:off x="2665476" y="1188720"/>
-            <a:ext cx="1833372" cy="1298448"/>
-          </a:xfrm>
-          <a:prstGeom prst="roundRect">
-            <a:avLst>
-              <a:gd name="adj" fmla="val 4225"/>
-            </a:avLst>
-          </a:prstGeom>
-          <a:solidFill>
-            <a:srgbClr val="FFFFFF"/>
-          </a:solidFill>
-          <a:ln w="12700">
-            <a:solidFill>
-              <a:srgbClr val="DCD5C1"/>
-            </a:solidFill>
-          </a:ln>
-        </p:spPr>
-        <p:txBody>
-          <a:bodyPr wrap="square" lIns="101600" tIns="101600" rIns="101600" bIns="101600" rtlCol="0" anchor="t"/>
-          <a:lstStyle/>
-          <a:p>
-            <a:pPr algn="l" indent="0" marL="0">
-              <a:lnSpc>
-                <a:spcPct val="100000"/>
-              </a:lnSpc>
-              <a:spcAft>
-                <a:spcPts val="300"/>
-              </a:spcAft>
-              <a:buNone/>
-            </a:pPr>
-            <a:r>
-              <a:rPr lang="en-US" sz="1350" b="1" dirty="0">
-                <a:solidFill>
-                  <a:srgbClr val="13294B"/>
-                </a:solidFill>
-                <a:latin typeface="Calibri" pitchFamily="34" charset="0"/>
-                <a:ea typeface="Calibri" pitchFamily="34" charset="-122"/>
-                <a:cs typeface="Calibri" pitchFamily="34" charset="-120"/>
-              </a:rPr>
-              <a:t>Educação</a:t>
-            </a:r>
-            <a:endParaRPr lang="en-US" sz="1350" dirty="0"/>
-          </a:p>
-          <a:p>
-            <a:pPr algn="l" indent="0" marL="0">
-              <a:lnSpc>
-                <a:spcPct val="100000"/>
-              </a:lnSpc>
-              <a:buNone/>
-            </a:pPr>
-            <a:r>
-              <a:rPr lang="en-US" sz="1250" dirty="0">
-                <a:solidFill>
-                  <a:srgbClr val="1F2A37"/>
-                </a:solidFill>
-                <a:latin typeface="Calibri" pitchFamily="34" charset="0"/>
-                <a:ea typeface="Calibri" pitchFamily="34" charset="-122"/>
-                <a:cs typeface="Calibri" pitchFamily="34" charset="-120"/>
-              </a:rPr>
-              <a:t>Taxa de atendimento em creche; IDEB.</a:t>
-            </a:r>
-            <a:endParaRPr lang="en-US" sz="1350" dirty="0"/>
-          </a:p>
-        </p:txBody>
-      </p:sp>
-      <p:sp>
-        <p:nvSpPr>
-          <p:cNvPr id="5" name="Text 3"/>
-          <p:cNvSpPr txBox="1"/>
-          <p:nvPr/>
-        </p:nvSpPr>
-        <p:spPr>
-          <a:xfrm>
-            <a:off x="4645152" y="1188720"/>
-            <a:ext cx="1833372" cy="1298448"/>
-          </a:xfrm>
-          <a:prstGeom prst="roundRect">
-            <a:avLst>
-              <a:gd name="adj" fmla="val 4225"/>
-            </a:avLst>
-          </a:prstGeom>
-          <a:solidFill>
-            <a:srgbClr val="FFFFFF"/>
-          </a:solidFill>
-          <a:ln w="12700">
-            <a:solidFill>
-              <a:srgbClr val="DCD5C1"/>
-            </a:solidFill>
-          </a:ln>
-        </p:spPr>
-        <p:txBody>
-          <a:bodyPr wrap="square" lIns="101600" tIns="101600" rIns="101600" bIns="101600" rtlCol="0" anchor="t"/>
-          <a:lstStyle/>
-          <a:p>
-            <a:pPr algn="l" indent="0" marL="0">
-              <a:lnSpc>
-                <a:spcPct val="100000"/>
-              </a:lnSpc>
-              <a:spcAft>
-                <a:spcPts val="300"/>
-              </a:spcAft>
-              <a:buNone/>
-            </a:pPr>
-            <a:r>
-              <a:rPr lang="en-US" sz="1350" b="1" dirty="0">
-                <a:solidFill>
-                  <a:srgbClr val="13294B"/>
-                </a:solidFill>
-                <a:latin typeface="Calibri" pitchFamily="34" charset="0"/>
-                <a:ea typeface="Calibri" pitchFamily="34" charset="-122"/>
-                <a:cs typeface="Calibri" pitchFamily="34" charset="-120"/>
-              </a:rPr>
-              <a:t>Saúde</a:t>
-            </a:r>
-            <a:endParaRPr lang="en-US" sz="1350" dirty="0"/>
-          </a:p>
-          <a:p>
-            <a:pPr algn="l" indent="0" marL="0">
-              <a:lnSpc>
-                <a:spcPct val="100000"/>
-              </a:lnSpc>
-              <a:buNone/>
-            </a:pPr>
-            <a:r>
-              <a:rPr lang="en-US" sz="1250" dirty="0">
-                <a:solidFill>
-                  <a:srgbClr val="1F2A37"/>
-                </a:solidFill>
-                <a:latin typeface="Calibri" pitchFamily="34" charset="0"/>
-                <a:ea typeface="Calibri" pitchFamily="34" charset="-122"/>
-                <a:cs typeface="Calibri" pitchFamily="34" charset="-120"/>
-              </a:rPr>
-              <a:t>Mortalidade infantil; cobertura vacinal.</a:t>
-            </a:r>
-            <a:endParaRPr lang="en-US" sz="1350" dirty="0"/>
-          </a:p>
-        </p:txBody>
-      </p:sp>
-      <p:sp>
-        <p:nvSpPr>
-          <p:cNvPr id="6" name="Text 4"/>
-          <p:cNvSpPr txBox="1"/>
-          <p:nvPr/>
-        </p:nvSpPr>
-        <p:spPr>
-          <a:xfrm>
-            <a:off x="6624828" y="1188720"/>
-            <a:ext cx="1833372" cy="1298448"/>
-          </a:xfrm>
-          <a:prstGeom prst="roundRect">
-            <a:avLst>
-              <a:gd name="adj" fmla="val 4225"/>
-            </a:avLst>
-          </a:prstGeom>
-          <a:solidFill>
-            <a:srgbClr val="FFFFFF"/>
-          </a:solidFill>
-          <a:ln w="12700">
-            <a:solidFill>
-              <a:srgbClr val="DCD5C1"/>
-            </a:solidFill>
-          </a:ln>
-        </p:spPr>
-        <p:txBody>
-          <a:bodyPr wrap="square" lIns="101600" tIns="101600" rIns="101600" bIns="101600" rtlCol="0" anchor="t"/>
-          <a:lstStyle/>
-          <a:p>
-            <a:pPr algn="l" indent="0" marL="0">
-              <a:lnSpc>
-                <a:spcPct val="100000"/>
-              </a:lnSpc>
-              <a:spcAft>
-                <a:spcPts val="300"/>
-              </a:spcAft>
-              <a:buNone/>
-            </a:pPr>
-            <a:r>
-              <a:rPr lang="en-US" sz="1350" b="1" dirty="0">
-                <a:solidFill>
-                  <a:srgbClr val="13294B"/>
-                </a:solidFill>
-                <a:latin typeface="Calibri" pitchFamily="34" charset="0"/>
-                <a:ea typeface="Calibri" pitchFamily="34" charset="-122"/>
-                <a:cs typeface="Calibri" pitchFamily="34" charset="-120"/>
-              </a:rPr>
-              <a:t>Trabalho e renda</a:t>
-            </a:r>
-            <a:endParaRPr lang="en-US" sz="1350" dirty="0"/>
-          </a:p>
-          <a:p>
-            <a:pPr algn="l" indent="0" marL="0">
-              <a:lnSpc>
-                <a:spcPct val="100000"/>
-              </a:lnSpc>
-              <a:buNone/>
-            </a:pPr>
-            <a:r>
-              <a:rPr lang="en-US" sz="1250" dirty="0">
-                <a:solidFill>
-                  <a:srgbClr val="1F2A37"/>
-                </a:solidFill>
-                <a:latin typeface="Calibri" pitchFamily="34" charset="0"/>
-                <a:ea typeface="Calibri" pitchFamily="34" charset="-122"/>
-                <a:cs typeface="Calibri" pitchFamily="34" charset="-120"/>
-              </a:rPr>
-              <a:t>Emprego formal; renda per capita.</a:t>
-            </a:r>
-            <a:endParaRPr lang="en-US" sz="1350" dirty="0"/>
-          </a:p>
-        </p:txBody>
-      </p:sp>
-      <p:sp>
-        <p:nvSpPr>
-          <p:cNvPr id="7" name="Text 5"/>
-          <p:cNvSpPr txBox="1"/>
-          <p:nvPr/>
-        </p:nvSpPr>
-        <p:spPr>
-          <a:xfrm>
-            <a:off x="685800" y="2651760"/>
-            <a:ext cx="1833372" cy="1298448"/>
-          </a:xfrm>
-          <a:prstGeom prst="roundRect">
-            <a:avLst>
-              <a:gd name="adj" fmla="val 4225"/>
-            </a:avLst>
-          </a:prstGeom>
-          <a:solidFill>
-            <a:srgbClr val="FFFFFF"/>
-          </a:solidFill>
-          <a:ln w="12700">
-            <a:solidFill>
-              <a:srgbClr val="DCD5C1"/>
-            </a:solidFill>
-          </a:ln>
-        </p:spPr>
-        <p:txBody>
-          <a:bodyPr wrap="square" lIns="101600" tIns="101600" rIns="101600" bIns="101600" rtlCol="0" anchor="t"/>
-          <a:lstStyle/>
-          <a:p>
-            <a:pPr algn="l" indent="0" marL="0">
-              <a:lnSpc>
-                <a:spcPct val="100000"/>
-              </a:lnSpc>
-              <a:spcAft>
-                <a:spcPts val="300"/>
-              </a:spcAft>
-              <a:buNone/>
-            </a:pPr>
-            <a:r>
-              <a:rPr lang="en-US" sz="1350" b="1" dirty="0">
-                <a:solidFill>
-                  <a:srgbClr val="13294B"/>
-                </a:solidFill>
-                <a:latin typeface="Calibri" pitchFamily="34" charset="0"/>
-                <a:ea typeface="Calibri" pitchFamily="34" charset="-122"/>
-                <a:cs typeface="Calibri" pitchFamily="34" charset="-120"/>
-              </a:rPr>
-              <a:t>Habitação e saneamento</a:t>
-            </a:r>
-            <a:endParaRPr lang="en-US" sz="1350" dirty="0"/>
-          </a:p>
-          <a:p>
-            <a:pPr algn="l" indent="0" marL="0">
-              <a:lnSpc>
-                <a:spcPct val="100000"/>
-              </a:lnSpc>
-              <a:buNone/>
-            </a:pPr>
-            <a:r>
-              <a:rPr lang="en-US" sz="1250" dirty="0">
-                <a:solidFill>
-                  <a:srgbClr val="1F2A37"/>
-                </a:solidFill>
-                <a:latin typeface="Calibri" pitchFamily="34" charset="0"/>
-                <a:ea typeface="Calibri" pitchFamily="34" charset="-122"/>
-                <a:cs typeface="Calibri" pitchFamily="34" charset="-120"/>
-              </a:rPr>
-              <a:t>% de domicílios com esgoto adequado.</a:t>
-            </a:r>
-            <a:endParaRPr lang="en-US" sz="1350" dirty="0"/>
-          </a:p>
-        </p:txBody>
-      </p:sp>
-      <p:sp>
-        <p:nvSpPr>
-          <p:cNvPr id="8" name="Text 6"/>
-          <p:cNvSpPr txBox="1"/>
-          <p:nvPr/>
-        </p:nvSpPr>
-        <p:spPr>
-          <a:xfrm>
-            <a:off x="2665476" y="2651760"/>
-            <a:ext cx="1833372" cy="1298448"/>
-          </a:xfrm>
-          <a:prstGeom prst="roundRect">
-            <a:avLst>
-              <a:gd name="adj" fmla="val 4225"/>
-            </a:avLst>
-          </a:prstGeom>
-          <a:solidFill>
-            <a:srgbClr val="FFFFFF"/>
-          </a:solidFill>
-          <a:ln w="12700">
-            <a:solidFill>
-              <a:srgbClr val="DCD5C1"/>
-            </a:solidFill>
-          </a:ln>
-        </p:spPr>
-        <p:txBody>
-          <a:bodyPr wrap="square" lIns="101600" tIns="101600" rIns="101600" bIns="101600" rtlCol="0" anchor="t"/>
-          <a:lstStyle/>
-          <a:p>
-            <a:pPr algn="l" indent="0" marL="0">
-              <a:lnSpc>
-                <a:spcPct val="100000"/>
-              </a:lnSpc>
-              <a:spcAft>
-                <a:spcPts val="300"/>
-              </a:spcAft>
-              <a:buNone/>
-            </a:pPr>
-            <a:r>
-              <a:rPr lang="en-US" sz="1350" b="1" dirty="0">
-                <a:solidFill>
-                  <a:srgbClr val="13294B"/>
-                </a:solidFill>
-                <a:latin typeface="Calibri" pitchFamily="34" charset="0"/>
-                <a:ea typeface="Calibri" pitchFamily="34" charset="-122"/>
-                <a:cs typeface="Calibri" pitchFamily="34" charset="-120"/>
-              </a:rPr>
-              <a:t>Assistência social</a:t>
-            </a:r>
-            <a:endParaRPr lang="en-US" sz="1350" dirty="0"/>
-          </a:p>
-          <a:p>
-            <a:pPr algn="l" indent="0" marL="0">
-              <a:lnSpc>
-                <a:spcPct val="100000"/>
-              </a:lnSpc>
-              <a:buNone/>
-            </a:pPr>
-            <a:r>
-              <a:rPr lang="en-US" sz="1250" dirty="0">
-                <a:solidFill>
-                  <a:srgbClr val="1F2A37"/>
-                </a:solidFill>
-                <a:latin typeface="Calibri" pitchFamily="34" charset="0"/>
-                <a:ea typeface="Calibri" pitchFamily="34" charset="-122"/>
-                <a:cs typeface="Calibri" pitchFamily="34" charset="-120"/>
-              </a:rPr>
-              <a:t>Famílias no CadÚnico por mil habitantes.</a:t>
-            </a:r>
-            <a:endParaRPr lang="en-US" sz="1350" dirty="0"/>
-          </a:p>
-        </p:txBody>
-      </p:sp>
-      <p:sp>
-        <p:nvSpPr>
-          <p:cNvPr id="9" name="Text 7"/>
-          <p:cNvSpPr txBox="1"/>
-          <p:nvPr/>
-        </p:nvSpPr>
-        <p:spPr>
-          <a:xfrm>
-            <a:off x="4645152" y="2651760"/>
-            <a:ext cx="1833372" cy="1298448"/>
-          </a:xfrm>
-          <a:prstGeom prst="roundRect">
-            <a:avLst>
-              <a:gd name="adj" fmla="val 4225"/>
-            </a:avLst>
-          </a:prstGeom>
-          <a:solidFill>
-            <a:srgbClr val="FFFFFF"/>
-          </a:solidFill>
-          <a:ln w="12700">
-            <a:solidFill>
-              <a:srgbClr val="DCD5C1"/>
-            </a:solidFill>
-          </a:ln>
-        </p:spPr>
-        <p:txBody>
-          <a:bodyPr wrap="square" lIns="101600" tIns="101600" rIns="101600" bIns="101600" rtlCol="0" anchor="t"/>
-          <a:lstStyle/>
-          <a:p>
-            <a:pPr algn="l" indent="0" marL="0">
-              <a:lnSpc>
-                <a:spcPct val="100000"/>
-              </a:lnSpc>
-              <a:spcAft>
-                <a:spcPts val="300"/>
-              </a:spcAft>
-              <a:buNone/>
-            </a:pPr>
-            <a:r>
-              <a:rPr lang="en-US" sz="1350" b="1" dirty="0">
-                <a:solidFill>
-                  <a:srgbClr val="13294B"/>
-                </a:solidFill>
-                <a:latin typeface="Calibri" pitchFamily="34" charset="0"/>
-                <a:ea typeface="Calibri" pitchFamily="34" charset="-122"/>
-                <a:cs typeface="Calibri" pitchFamily="34" charset="-120"/>
-              </a:rPr>
-              <a:t>Segurança</a:t>
-            </a:r>
-            <a:endParaRPr lang="en-US" sz="1350" dirty="0"/>
-          </a:p>
-          <a:p>
-            <a:pPr algn="l" indent="0" marL="0">
-              <a:lnSpc>
-                <a:spcPct val="100000"/>
-              </a:lnSpc>
-              <a:buNone/>
-            </a:pPr>
-            <a:r>
-              <a:rPr lang="en-US" sz="1250" dirty="0">
-                <a:solidFill>
-                  <a:srgbClr val="1F2A37"/>
-                </a:solidFill>
-                <a:latin typeface="Calibri" pitchFamily="34" charset="0"/>
-                <a:ea typeface="Calibri" pitchFamily="34" charset="-122"/>
-                <a:cs typeface="Calibri" pitchFamily="34" charset="-120"/>
-              </a:rPr>
-              <a:t>Taxa de homicídios por 100 mil habitantes.</a:t>
-            </a:r>
-            <a:endParaRPr lang="en-US" sz="1350" dirty="0"/>
-          </a:p>
-        </p:txBody>
-      </p:sp>
-      <p:sp>
-        <p:nvSpPr>
-          <p:cNvPr id="10" name="Text 8"/>
-          <p:cNvSpPr txBox="1"/>
-          <p:nvPr/>
-        </p:nvSpPr>
-        <p:spPr>
-          <a:xfrm>
-            <a:off x="6624828" y="2651760"/>
-            <a:ext cx="1833372" cy="1298448"/>
-          </a:xfrm>
-          <a:prstGeom prst="roundRect">
-            <a:avLst>
-              <a:gd name="adj" fmla="val 4225"/>
-            </a:avLst>
-          </a:prstGeom>
-          <a:solidFill>
-            <a:srgbClr val="FFFFFF"/>
-          </a:solidFill>
-          <a:ln w="12700">
-            <a:solidFill>
-              <a:srgbClr val="DCD5C1"/>
-            </a:solidFill>
-          </a:ln>
-        </p:spPr>
-        <p:txBody>
-          <a:bodyPr wrap="square" lIns="101600" tIns="101600" rIns="101600" bIns="101600" rtlCol="0" anchor="t"/>
-          <a:lstStyle/>
-          <a:p>
-            <a:pPr algn="l" indent="0" marL="0">
-              <a:lnSpc>
-                <a:spcPct val="100000"/>
-              </a:lnSpc>
-              <a:spcAft>
-                <a:spcPts val="300"/>
-              </a:spcAft>
-              <a:buNone/>
-            </a:pPr>
-            <a:r>
-              <a:rPr lang="en-US" sz="1350" b="1" dirty="0">
-                <a:solidFill>
-                  <a:srgbClr val="13294B"/>
-                </a:solidFill>
-                <a:latin typeface="Calibri" pitchFamily="34" charset="0"/>
-                <a:ea typeface="Calibri" pitchFamily="34" charset="-122"/>
-                <a:cs typeface="Calibri" pitchFamily="34" charset="-120"/>
-              </a:rPr>
-              <a:t>Finanças públicas</a:t>
-            </a:r>
-            <a:endParaRPr lang="en-US" sz="1350" dirty="0"/>
-          </a:p>
-          <a:p>
-            <a:pPr algn="l" indent="0" marL="0">
-              <a:lnSpc>
-                <a:spcPct val="100000"/>
-              </a:lnSpc>
-              <a:buNone/>
-            </a:pPr>
-            <a:r>
-              <a:rPr lang="en-US" sz="1250" dirty="0">
-                <a:solidFill>
-                  <a:srgbClr val="1F2A37"/>
-                </a:solidFill>
-                <a:latin typeface="Calibri" pitchFamily="34" charset="0"/>
-                <a:ea typeface="Calibri" pitchFamily="34" charset="-122"/>
-                <a:cs typeface="Calibri" pitchFamily="34" charset="-120"/>
-              </a:rPr>
-              <a:t>Receita própria sobre receita total.</a:t>
-            </a:r>
-            <a:endParaRPr lang="en-US" sz="1350" dirty="0"/>
-          </a:p>
-        </p:txBody>
-      </p:sp>
-      <p:sp>
-        <p:nvSpPr>
-          <p:cNvPr id="11" name="Text 9"/>
+              <a:t>Dimensões e exemplos de indicadores</a:t>
+            </a:r>
+            <a:endParaRPr lang="en-US" sz="2600" dirty="0"/>
+          </a:p>
+        </p:txBody>
+      </p:sp>
+      <p:graphicFrame>
+        <p:nvGraphicFramePr>
+          <p:cNvPr id="10" name="Table 0"/>
+          <p:cNvGraphicFramePr>
+            <a:graphicFrameLocks noGrp="1"/>
+          </p:cNvGraphicFramePr>
+          <p:nvPr>
+            <p:extLst>
+              <p:ext uri="{D42A27DB-BD31-4B8C-83A1-F6EECF244321}">
+                <p14:modId xmlns:p14="http://schemas.microsoft.com/office/powerpoint/2010/main" val="1579011935"/>
+              </p:ext>
+            </p:extLst>
+          </p:nvPr>
+        </p:nvGraphicFramePr>
+        <p:xfrm>
+          <a:off x="685800" y="1097280"/>
+          <a:ext cx="7772400" cy="914400"/>
+        </p:xfrm>
+        <a:graphic>
+          <a:graphicData uri="http://schemas.openxmlformats.org/drawingml/2006/table">
+            <a:tbl>
+              <a:tblPr/>
+              <a:tblGrid>
+                <a:gridCol w="2377440"/>
+                <a:gridCol w="5394960"/>
+              </a:tblGrid>
+              <a:tr h="0">
+                <a:tc>
+                  <a:txBody>
+                    <a:bodyPr/>
+                    <a:lstStyle/>
+                    <a:p>
+                      <a:pPr indent="0" marL="0">
+                        <a:buNone/>
+                      </a:pPr>
+                      <a:r>
+                        <a:rPr lang="en-US" sz="1250" b="1" dirty="0">
+                          <a:solidFill>
+                            <a:srgbClr val="FFFFFF"/>
+                          </a:solidFill>
+                          <a:latin typeface="Calibri" pitchFamily="34" charset="0"/>
+                          <a:ea typeface="Calibri" pitchFamily="34" charset="-122"/>
+                          <a:cs typeface="Calibri" pitchFamily="34" charset="-120"/>
+                        </a:rPr>
+                        <a:t>Dimensão</a:t>
+                      </a:r>
+                      <a:endParaRPr lang="en-US" sz="1250" dirty="0">
+                        <a:latin typeface="Calibri" charset="0"/>
+                        <a:ea typeface="Calibri" charset="0"/>
+                        <a:cs typeface="Calibri" charset="0"/>
+                      </a:endParaRPr>
+                    </a:p>
+                  </a:txBody>
+                  <a:tcPr marL="50800" marR="50800" marT="50800" marB="50800" anchor="ctr">
+                    <a:lnL w="9525" cap="flat" cmpd="sng" algn="ctr">
+                      <a:solidFill>
+                        <a:srgbClr val="DCD5C1"/>
+                      </a:solidFill>
+                      <a:prstDash val="solid"/>
+                      <a:round/>
+                      <a:headEnd type="none" w="med" len="med"/>
+                      <a:tailEnd type="none" w="med" len="med"/>
+                    </a:lnL>
+                    <a:lnR w="9525" cap="flat" cmpd="sng" algn="ctr">
+                      <a:solidFill>
+                        <a:srgbClr val="DCD5C1"/>
+                      </a:solidFill>
+                      <a:prstDash val="solid"/>
+                      <a:round/>
+                      <a:headEnd type="none" w="med" len="med"/>
+                      <a:tailEnd type="none" w="med" len="med"/>
+                    </a:lnR>
+                    <a:lnT w="9525" cap="flat" cmpd="sng" algn="ctr">
+                      <a:solidFill>
+                        <a:srgbClr val="DCD5C1"/>
+                      </a:solidFill>
+                      <a:prstDash val="solid"/>
+                      <a:round/>
+                      <a:headEnd type="none" w="med" len="med"/>
+                      <a:tailEnd type="none" w="med" len="med"/>
+                    </a:lnT>
+                    <a:lnB w="9525" cap="flat" cmpd="sng" algn="ctr">
+                      <a:solidFill>
+                        <a:srgbClr val="DCD5C1"/>
+                      </a:solidFill>
+                      <a:prstDash val="solid"/>
+                      <a:round/>
+                      <a:headEnd type="none" w="med" len="med"/>
+                      <a:tailEnd type="none" w="med" len="med"/>
+                    </a:lnB>
+                    <a:solidFill>
+                      <a:srgbClr val="13294B"/>
+                    </a:solidFill>
+                  </a:tcPr>
+                </a:tc>
+                <a:tc>
+                  <a:txBody>
+                    <a:bodyPr/>
+                    <a:lstStyle/>
+                    <a:p>
+                      <a:pPr indent="0" marL="0">
+                        <a:buNone/>
+                      </a:pPr>
+                      <a:r>
+                        <a:rPr lang="en-US" sz="1250" b="1" dirty="0">
+                          <a:solidFill>
+                            <a:srgbClr val="FFFFFF"/>
+                          </a:solidFill>
+                          <a:latin typeface="Calibri" pitchFamily="34" charset="0"/>
+                          <a:ea typeface="Calibri" pitchFamily="34" charset="-122"/>
+                          <a:cs typeface="Calibri" pitchFamily="34" charset="-120"/>
+                        </a:rPr>
+                        <a:t>Exemplos</a:t>
+                      </a:r>
+                      <a:endParaRPr lang="en-US" sz="1250" dirty="0">
+                        <a:latin typeface="Calibri" charset="0"/>
+                        <a:ea typeface="Calibri" charset="0"/>
+                        <a:cs typeface="Calibri" charset="0"/>
+                      </a:endParaRPr>
+                    </a:p>
+                  </a:txBody>
+                  <a:tcPr marL="50800" marR="50800" marT="50800" marB="50800" anchor="ctr">
+                    <a:lnL w="9525" cap="flat" cmpd="sng" algn="ctr">
+                      <a:solidFill>
+                        <a:srgbClr val="DCD5C1"/>
+                      </a:solidFill>
+                      <a:prstDash val="solid"/>
+                      <a:round/>
+                      <a:headEnd type="none" w="med" len="med"/>
+                      <a:tailEnd type="none" w="med" len="med"/>
+                    </a:lnL>
+                    <a:lnR w="9525" cap="flat" cmpd="sng" algn="ctr">
+                      <a:solidFill>
+                        <a:srgbClr val="DCD5C1"/>
+                      </a:solidFill>
+                      <a:prstDash val="solid"/>
+                      <a:round/>
+                      <a:headEnd type="none" w="med" len="med"/>
+                      <a:tailEnd type="none" w="med" len="med"/>
+                    </a:lnR>
+                    <a:lnT w="9525" cap="flat" cmpd="sng" algn="ctr">
+                      <a:solidFill>
+                        <a:srgbClr val="DCD5C1"/>
+                      </a:solidFill>
+                      <a:prstDash val="solid"/>
+                      <a:round/>
+                      <a:headEnd type="none" w="med" len="med"/>
+                      <a:tailEnd type="none" w="med" len="med"/>
+                    </a:lnT>
+                    <a:lnB w="9525" cap="flat" cmpd="sng" algn="ctr">
+                      <a:solidFill>
+                        <a:srgbClr val="DCD5C1"/>
+                      </a:solidFill>
+                      <a:prstDash val="solid"/>
+                      <a:round/>
+                      <a:headEnd type="none" w="med" len="med"/>
+                      <a:tailEnd type="none" w="med" len="med"/>
+                    </a:lnB>
+                    <a:solidFill>
+                      <a:srgbClr val="13294B"/>
+                    </a:solidFill>
+                  </a:tcPr>
+                </a:tc>
+              </a:tr>
+              <a:tr h="0">
+                <a:tc>
+                  <a:txBody>
+                    <a:bodyPr/>
+                    <a:lstStyle/>
+                    <a:p>
+                      <a:pPr indent="0" marL="0">
+                        <a:buNone/>
+                      </a:pPr>
+                      <a:r>
+                        <a:rPr lang="en-US" sz="1250" b="1" dirty="0">
+                          <a:solidFill>
+                            <a:srgbClr val="1F2A37"/>
+                          </a:solidFill>
+                          <a:latin typeface="Calibri" pitchFamily="34" charset="0"/>
+                          <a:ea typeface="Calibri" pitchFamily="34" charset="-122"/>
+                          <a:cs typeface="Calibri" pitchFamily="34" charset="-120"/>
+                        </a:rPr>
+                        <a:t>Demografia</a:t>
+                      </a:r>
+                      <a:endParaRPr lang="en-US" sz="1250" dirty="0">
+                        <a:latin typeface="Calibri" charset="0"/>
+                        <a:ea typeface="Calibri" charset="0"/>
+                        <a:cs typeface="Calibri" charset="0"/>
+                      </a:endParaRPr>
+                    </a:p>
+                  </a:txBody>
+                  <a:tcPr marL="50800" marR="50800" marT="50800" marB="50800" anchor="ctr">
+                    <a:lnL w="9525" cap="flat" cmpd="sng" algn="ctr">
+                      <a:solidFill>
+                        <a:srgbClr val="DCD5C1"/>
+                      </a:solidFill>
+                      <a:prstDash val="solid"/>
+                      <a:round/>
+                      <a:headEnd type="none" w="med" len="med"/>
+                      <a:tailEnd type="none" w="med" len="med"/>
+                    </a:lnL>
+                    <a:lnR w="9525" cap="flat" cmpd="sng" algn="ctr">
+                      <a:solidFill>
+                        <a:srgbClr val="DCD5C1"/>
+                      </a:solidFill>
+                      <a:prstDash val="solid"/>
+                      <a:round/>
+                      <a:headEnd type="none" w="med" len="med"/>
+                      <a:tailEnd type="none" w="med" len="med"/>
+                    </a:lnR>
+                    <a:lnT w="9525" cap="flat" cmpd="sng" algn="ctr">
+                      <a:solidFill>
+                        <a:srgbClr val="DCD5C1"/>
+                      </a:solidFill>
+                      <a:prstDash val="solid"/>
+                      <a:round/>
+                      <a:headEnd type="none" w="med" len="med"/>
+                      <a:tailEnd type="none" w="med" len="med"/>
+                    </a:lnT>
+                    <a:lnB w="9525" cap="flat" cmpd="sng" algn="ctr">
+                      <a:solidFill>
+                        <a:srgbClr val="DCD5C1"/>
+                      </a:solidFill>
+                      <a:prstDash val="solid"/>
+                      <a:round/>
+                      <a:headEnd type="none" w="med" len="med"/>
+                      <a:tailEnd type="none" w="med" len="med"/>
+                    </a:lnB>
+                    <a:solidFill>
+                      <a:srgbClr val="FFFFFF"/>
+                    </a:solidFill>
+                  </a:tcPr>
+                </a:tc>
+                <a:tc>
+                  <a:txBody>
+                    <a:bodyPr/>
+                    <a:lstStyle/>
+                    <a:p>
+                      <a:pPr indent="0" marL="0">
+                        <a:buNone/>
+                      </a:pPr>
+                      <a:r>
+                        <a:rPr lang="en-US" sz="1250" dirty="0">
+                          <a:solidFill>
+                            <a:srgbClr val="1F2A37"/>
+                          </a:solidFill>
+                          <a:latin typeface="Calibri" pitchFamily="34" charset="0"/>
+                          <a:ea typeface="Calibri" pitchFamily="34" charset="-122"/>
+                          <a:cs typeface="Calibri" pitchFamily="34" charset="-120"/>
+                        </a:rPr>
+                        <a:t>População por idade; taxa de crescimento</a:t>
+                      </a:r>
+                      <a:endParaRPr lang="en-US" sz="1250" dirty="0">
+                        <a:latin typeface="Calibri" charset="0"/>
+                        <a:ea typeface="Calibri" charset="0"/>
+                        <a:cs typeface="Calibri" charset="0"/>
+                      </a:endParaRPr>
+                    </a:p>
+                  </a:txBody>
+                  <a:tcPr marL="50800" marR="50800" marT="50800" marB="50800" anchor="ctr">
+                    <a:lnL w="9525" cap="flat" cmpd="sng" algn="ctr">
+                      <a:solidFill>
+                        <a:srgbClr val="DCD5C1"/>
+                      </a:solidFill>
+                      <a:prstDash val="solid"/>
+                      <a:round/>
+                      <a:headEnd type="none" w="med" len="med"/>
+                      <a:tailEnd type="none" w="med" len="med"/>
+                    </a:lnL>
+                    <a:lnR w="9525" cap="flat" cmpd="sng" algn="ctr">
+                      <a:solidFill>
+                        <a:srgbClr val="DCD5C1"/>
+                      </a:solidFill>
+                      <a:prstDash val="solid"/>
+                      <a:round/>
+                      <a:headEnd type="none" w="med" len="med"/>
+                      <a:tailEnd type="none" w="med" len="med"/>
+                    </a:lnR>
+                    <a:lnT w="9525" cap="flat" cmpd="sng" algn="ctr">
+                      <a:solidFill>
+                        <a:srgbClr val="DCD5C1"/>
+                      </a:solidFill>
+                      <a:prstDash val="solid"/>
+                      <a:round/>
+                      <a:headEnd type="none" w="med" len="med"/>
+                      <a:tailEnd type="none" w="med" len="med"/>
+                    </a:lnT>
+                    <a:lnB w="9525" cap="flat" cmpd="sng" algn="ctr">
+                      <a:solidFill>
+                        <a:srgbClr val="DCD5C1"/>
+                      </a:solidFill>
+                      <a:prstDash val="solid"/>
+                      <a:round/>
+                      <a:headEnd type="none" w="med" len="med"/>
+                      <a:tailEnd type="none" w="med" len="med"/>
+                    </a:lnB>
+                    <a:solidFill>
+                      <a:srgbClr val="FFFFFF"/>
+                    </a:solidFill>
+                  </a:tcPr>
+                </a:tc>
+              </a:tr>
+              <a:tr h="0">
+                <a:tc>
+                  <a:txBody>
+                    <a:bodyPr/>
+                    <a:lstStyle/>
+                    <a:p>
+                      <a:pPr indent="0" marL="0">
+                        <a:buNone/>
+                      </a:pPr>
+                      <a:r>
+                        <a:rPr lang="en-US" sz="1250" b="1" dirty="0">
+                          <a:solidFill>
+                            <a:srgbClr val="1F2A37"/>
+                          </a:solidFill>
+                          <a:latin typeface="Calibri" pitchFamily="34" charset="0"/>
+                          <a:ea typeface="Calibri" pitchFamily="34" charset="-122"/>
+                          <a:cs typeface="Calibri" pitchFamily="34" charset="-120"/>
+                        </a:rPr>
+                        <a:t>Educação</a:t>
+                      </a:r>
+                      <a:endParaRPr lang="en-US" sz="1250" dirty="0">
+                        <a:latin typeface="Calibri" charset="0"/>
+                        <a:ea typeface="Calibri" charset="0"/>
+                        <a:cs typeface="Calibri" charset="0"/>
+                      </a:endParaRPr>
+                    </a:p>
+                  </a:txBody>
+                  <a:tcPr marL="50800" marR="50800" marT="50800" marB="50800" anchor="ctr">
+                    <a:lnL w="9525" cap="flat" cmpd="sng" algn="ctr">
+                      <a:solidFill>
+                        <a:srgbClr val="DCD5C1"/>
+                      </a:solidFill>
+                      <a:prstDash val="solid"/>
+                      <a:round/>
+                      <a:headEnd type="none" w="med" len="med"/>
+                      <a:tailEnd type="none" w="med" len="med"/>
+                    </a:lnL>
+                    <a:lnR w="9525" cap="flat" cmpd="sng" algn="ctr">
+                      <a:solidFill>
+                        <a:srgbClr val="DCD5C1"/>
+                      </a:solidFill>
+                      <a:prstDash val="solid"/>
+                      <a:round/>
+                      <a:headEnd type="none" w="med" len="med"/>
+                      <a:tailEnd type="none" w="med" len="med"/>
+                    </a:lnR>
+                    <a:lnT w="9525" cap="flat" cmpd="sng" algn="ctr">
+                      <a:solidFill>
+                        <a:srgbClr val="DCD5C1"/>
+                      </a:solidFill>
+                      <a:prstDash val="solid"/>
+                      <a:round/>
+                      <a:headEnd type="none" w="med" len="med"/>
+                      <a:tailEnd type="none" w="med" len="med"/>
+                    </a:lnT>
+                    <a:lnB w="9525" cap="flat" cmpd="sng" algn="ctr">
+                      <a:solidFill>
+                        <a:srgbClr val="DCD5C1"/>
+                      </a:solidFill>
+                      <a:prstDash val="solid"/>
+                      <a:round/>
+                      <a:headEnd type="none" w="med" len="med"/>
+                      <a:tailEnd type="none" w="med" len="med"/>
+                    </a:lnB>
+                    <a:solidFill>
+                      <a:srgbClr val="F4F7F8"/>
+                    </a:solidFill>
+                  </a:tcPr>
+                </a:tc>
+                <a:tc>
+                  <a:txBody>
+                    <a:bodyPr/>
+                    <a:lstStyle/>
+                    <a:p>
+                      <a:pPr indent="0" marL="0">
+                        <a:buNone/>
+                      </a:pPr>
+                      <a:r>
+                        <a:rPr lang="en-US" sz="1250" dirty="0">
+                          <a:solidFill>
+                            <a:srgbClr val="1F2A37"/>
+                          </a:solidFill>
+                          <a:latin typeface="Calibri" pitchFamily="34" charset="0"/>
+                          <a:ea typeface="Calibri" pitchFamily="34" charset="-122"/>
+                          <a:cs typeface="Calibri" pitchFamily="34" charset="-120"/>
+                        </a:rPr>
+                        <a:t>Taxa de atendimento em creche; IDEB; distorção idade-série</a:t>
+                      </a:r>
+                      <a:endParaRPr lang="en-US" sz="1250" dirty="0">
+                        <a:latin typeface="Calibri" charset="0"/>
+                        <a:ea typeface="Calibri" charset="0"/>
+                        <a:cs typeface="Calibri" charset="0"/>
+                      </a:endParaRPr>
+                    </a:p>
+                  </a:txBody>
+                  <a:tcPr marL="50800" marR="50800" marT="50800" marB="50800" anchor="ctr">
+                    <a:lnL w="9525" cap="flat" cmpd="sng" algn="ctr">
+                      <a:solidFill>
+                        <a:srgbClr val="DCD5C1"/>
+                      </a:solidFill>
+                      <a:prstDash val="solid"/>
+                      <a:round/>
+                      <a:headEnd type="none" w="med" len="med"/>
+                      <a:tailEnd type="none" w="med" len="med"/>
+                    </a:lnL>
+                    <a:lnR w="9525" cap="flat" cmpd="sng" algn="ctr">
+                      <a:solidFill>
+                        <a:srgbClr val="DCD5C1"/>
+                      </a:solidFill>
+                      <a:prstDash val="solid"/>
+                      <a:round/>
+                      <a:headEnd type="none" w="med" len="med"/>
+                      <a:tailEnd type="none" w="med" len="med"/>
+                    </a:lnR>
+                    <a:lnT w="9525" cap="flat" cmpd="sng" algn="ctr">
+                      <a:solidFill>
+                        <a:srgbClr val="DCD5C1"/>
+                      </a:solidFill>
+                      <a:prstDash val="solid"/>
+                      <a:round/>
+                      <a:headEnd type="none" w="med" len="med"/>
+                      <a:tailEnd type="none" w="med" len="med"/>
+                    </a:lnT>
+                    <a:lnB w="9525" cap="flat" cmpd="sng" algn="ctr">
+                      <a:solidFill>
+                        <a:srgbClr val="DCD5C1"/>
+                      </a:solidFill>
+                      <a:prstDash val="solid"/>
+                      <a:round/>
+                      <a:headEnd type="none" w="med" len="med"/>
+                      <a:tailEnd type="none" w="med" len="med"/>
+                    </a:lnB>
+                    <a:solidFill>
+                      <a:srgbClr val="F4F7F8"/>
+                    </a:solidFill>
+                  </a:tcPr>
+                </a:tc>
+              </a:tr>
+              <a:tr h="0">
+                <a:tc>
+                  <a:txBody>
+                    <a:bodyPr/>
+                    <a:lstStyle/>
+                    <a:p>
+                      <a:pPr indent="0" marL="0">
+                        <a:buNone/>
+                      </a:pPr>
+                      <a:r>
+                        <a:rPr lang="en-US" sz="1250" b="1" dirty="0">
+                          <a:solidFill>
+                            <a:srgbClr val="1F2A37"/>
+                          </a:solidFill>
+                          <a:latin typeface="Calibri" pitchFamily="34" charset="0"/>
+                          <a:ea typeface="Calibri" pitchFamily="34" charset="-122"/>
+                          <a:cs typeface="Calibri" pitchFamily="34" charset="-120"/>
+                        </a:rPr>
+                        <a:t>Saúde</a:t>
+                      </a:r>
+                      <a:endParaRPr lang="en-US" sz="1250" dirty="0">
+                        <a:latin typeface="Calibri" charset="0"/>
+                        <a:ea typeface="Calibri" charset="0"/>
+                        <a:cs typeface="Calibri" charset="0"/>
+                      </a:endParaRPr>
+                    </a:p>
+                  </a:txBody>
+                  <a:tcPr marL="50800" marR="50800" marT="50800" marB="50800" anchor="ctr">
+                    <a:lnL w="9525" cap="flat" cmpd="sng" algn="ctr">
+                      <a:solidFill>
+                        <a:srgbClr val="DCD5C1"/>
+                      </a:solidFill>
+                      <a:prstDash val="solid"/>
+                      <a:round/>
+                      <a:headEnd type="none" w="med" len="med"/>
+                      <a:tailEnd type="none" w="med" len="med"/>
+                    </a:lnL>
+                    <a:lnR w="9525" cap="flat" cmpd="sng" algn="ctr">
+                      <a:solidFill>
+                        <a:srgbClr val="DCD5C1"/>
+                      </a:solidFill>
+                      <a:prstDash val="solid"/>
+                      <a:round/>
+                      <a:headEnd type="none" w="med" len="med"/>
+                      <a:tailEnd type="none" w="med" len="med"/>
+                    </a:lnR>
+                    <a:lnT w="9525" cap="flat" cmpd="sng" algn="ctr">
+                      <a:solidFill>
+                        <a:srgbClr val="DCD5C1"/>
+                      </a:solidFill>
+                      <a:prstDash val="solid"/>
+                      <a:round/>
+                      <a:headEnd type="none" w="med" len="med"/>
+                      <a:tailEnd type="none" w="med" len="med"/>
+                    </a:lnT>
+                    <a:lnB w="9525" cap="flat" cmpd="sng" algn="ctr">
+                      <a:solidFill>
+                        <a:srgbClr val="DCD5C1"/>
+                      </a:solidFill>
+                      <a:prstDash val="solid"/>
+                      <a:round/>
+                      <a:headEnd type="none" w="med" len="med"/>
+                      <a:tailEnd type="none" w="med" len="med"/>
+                    </a:lnB>
+                    <a:solidFill>
+                      <a:srgbClr val="FFFFFF"/>
+                    </a:solidFill>
+                  </a:tcPr>
+                </a:tc>
+                <a:tc>
+                  <a:txBody>
+                    <a:bodyPr/>
+                    <a:lstStyle/>
+                    <a:p>
+                      <a:pPr indent="0" marL="0">
+                        <a:buNone/>
+                      </a:pPr>
+                      <a:r>
+                        <a:rPr lang="en-US" sz="1250" dirty="0">
+                          <a:solidFill>
+                            <a:srgbClr val="1F2A37"/>
+                          </a:solidFill>
+                          <a:latin typeface="Calibri" pitchFamily="34" charset="0"/>
+                          <a:ea typeface="Calibri" pitchFamily="34" charset="-122"/>
+                          <a:cs typeface="Calibri" pitchFamily="34" charset="-120"/>
+                        </a:rPr>
+                        <a:t>Mortalidade infantil; cobertura vacinal; gestantes com 7+ consultas</a:t>
+                      </a:r>
+                      <a:endParaRPr lang="en-US" sz="1250" dirty="0">
+                        <a:latin typeface="Calibri" charset="0"/>
+                        <a:ea typeface="Calibri" charset="0"/>
+                        <a:cs typeface="Calibri" charset="0"/>
+                      </a:endParaRPr>
+                    </a:p>
+                  </a:txBody>
+                  <a:tcPr marL="50800" marR="50800" marT="50800" marB="50800" anchor="ctr">
+                    <a:lnL w="9525" cap="flat" cmpd="sng" algn="ctr">
+                      <a:solidFill>
+                        <a:srgbClr val="DCD5C1"/>
+                      </a:solidFill>
+                      <a:prstDash val="solid"/>
+                      <a:round/>
+                      <a:headEnd type="none" w="med" len="med"/>
+                      <a:tailEnd type="none" w="med" len="med"/>
+                    </a:lnL>
+                    <a:lnR w="9525" cap="flat" cmpd="sng" algn="ctr">
+                      <a:solidFill>
+                        <a:srgbClr val="DCD5C1"/>
+                      </a:solidFill>
+                      <a:prstDash val="solid"/>
+                      <a:round/>
+                      <a:headEnd type="none" w="med" len="med"/>
+                      <a:tailEnd type="none" w="med" len="med"/>
+                    </a:lnR>
+                    <a:lnT w="9525" cap="flat" cmpd="sng" algn="ctr">
+                      <a:solidFill>
+                        <a:srgbClr val="DCD5C1"/>
+                      </a:solidFill>
+                      <a:prstDash val="solid"/>
+                      <a:round/>
+                      <a:headEnd type="none" w="med" len="med"/>
+                      <a:tailEnd type="none" w="med" len="med"/>
+                    </a:lnT>
+                    <a:lnB w="9525" cap="flat" cmpd="sng" algn="ctr">
+                      <a:solidFill>
+                        <a:srgbClr val="DCD5C1"/>
+                      </a:solidFill>
+                      <a:prstDash val="solid"/>
+                      <a:round/>
+                      <a:headEnd type="none" w="med" len="med"/>
+                      <a:tailEnd type="none" w="med" len="med"/>
+                    </a:lnB>
+                    <a:solidFill>
+                      <a:srgbClr val="FFFFFF"/>
+                    </a:solidFill>
+                  </a:tcPr>
+                </a:tc>
+              </a:tr>
+              <a:tr h="0">
+                <a:tc>
+                  <a:txBody>
+                    <a:bodyPr/>
+                    <a:lstStyle/>
+                    <a:p>
+                      <a:pPr indent="0" marL="0">
+                        <a:buNone/>
+                      </a:pPr>
+                      <a:r>
+                        <a:rPr lang="en-US" sz="1250" b="1" dirty="0">
+                          <a:solidFill>
+                            <a:srgbClr val="1F2A37"/>
+                          </a:solidFill>
+                          <a:latin typeface="Calibri" pitchFamily="34" charset="0"/>
+                          <a:ea typeface="Calibri" pitchFamily="34" charset="-122"/>
+                          <a:cs typeface="Calibri" pitchFamily="34" charset="-120"/>
+                        </a:rPr>
+                        <a:t>Trabalho e renda</a:t>
+                      </a:r>
+                      <a:endParaRPr lang="en-US" sz="1250" dirty="0">
+                        <a:latin typeface="Calibri" charset="0"/>
+                        <a:ea typeface="Calibri" charset="0"/>
+                        <a:cs typeface="Calibri" charset="0"/>
+                      </a:endParaRPr>
+                    </a:p>
+                  </a:txBody>
+                  <a:tcPr marL="50800" marR="50800" marT="50800" marB="50800" anchor="ctr">
+                    <a:lnL w="9525" cap="flat" cmpd="sng" algn="ctr">
+                      <a:solidFill>
+                        <a:srgbClr val="DCD5C1"/>
+                      </a:solidFill>
+                      <a:prstDash val="solid"/>
+                      <a:round/>
+                      <a:headEnd type="none" w="med" len="med"/>
+                      <a:tailEnd type="none" w="med" len="med"/>
+                    </a:lnL>
+                    <a:lnR w="9525" cap="flat" cmpd="sng" algn="ctr">
+                      <a:solidFill>
+                        <a:srgbClr val="DCD5C1"/>
+                      </a:solidFill>
+                      <a:prstDash val="solid"/>
+                      <a:round/>
+                      <a:headEnd type="none" w="med" len="med"/>
+                      <a:tailEnd type="none" w="med" len="med"/>
+                    </a:lnR>
+                    <a:lnT w="9525" cap="flat" cmpd="sng" algn="ctr">
+                      <a:solidFill>
+                        <a:srgbClr val="DCD5C1"/>
+                      </a:solidFill>
+                      <a:prstDash val="solid"/>
+                      <a:round/>
+                      <a:headEnd type="none" w="med" len="med"/>
+                      <a:tailEnd type="none" w="med" len="med"/>
+                    </a:lnT>
+                    <a:lnB w="9525" cap="flat" cmpd="sng" algn="ctr">
+                      <a:solidFill>
+                        <a:srgbClr val="DCD5C1"/>
+                      </a:solidFill>
+                      <a:prstDash val="solid"/>
+                      <a:round/>
+                      <a:headEnd type="none" w="med" len="med"/>
+                      <a:tailEnd type="none" w="med" len="med"/>
+                    </a:lnB>
+                    <a:solidFill>
+                      <a:srgbClr val="F4F7F8"/>
+                    </a:solidFill>
+                  </a:tcPr>
+                </a:tc>
+                <a:tc>
+                  <a:txBody>
+                    <a:bodyPr/>
+                    <a:lstStyle/>
+                    <a:p>
+                      <a:pPr indent="0" marL="0">
+                        <a:buNone/>
+                      </a:pPr>
+                      <a:r>
+                        <a:rPr lang="en-US" sz="1250" dirty="0">
+                          <a:solidFill>
+                            <a:srgbClr val="1F2A37"/>
+                          </a:solidFill>
+                          <a:latin typeface="Calibri" pitchFamily="34" charset="0"/>
+                          <a:ea typeface="Calibri" pitchFamily="34" charset="-122"/>
+                          <a:cs typeface="Calibri" pitchFamily="34" charset="-120"/>
+                        </a:rPr>
+                        <a:t>Saldo de empregos formais; renda per capita</a:t>
+                      </a:r>
+                      <a:endParaRPr lang="en-US" sz="1250" dirty="0">
+                        <a:latin typeface="Calibri" charset="0"/>
+                        <a:ea typeface="Calibri" charset="0"/>
+                        <a:cs typeface="Calibri" charset="0"/>
+                      </a:endParaRPr>
+                    </a:p>
+                  </a:txBody>
+                  <a:tcPr marL="50800" marR="50800" marT="50800" marB="50800" anchor="ctr">
+                    <a:lnL w="9525" cap="flat" cmpd="sng" algn="ctr">
+                      <a:solidFill>
+                        <a:srgbClr val="DCD5C1"/>
+                      </a:solidFill>
+                      <a:prstDash val="solid"/>
+                      <a:round/>
+                      <a:headEnd type="none" w="med" len="med"/>
+                      <a:tailEnd type="none" w="med" len="med"/>
+                    </a:lnL>
+                    <a:lnR w="9525" cap="flat" cmpd="sng" algn="ctr">
+                      <a:solidFill>
+                        <a:srgbClr val="DCD5C1"/>
+                      </a:solidFill>
+                      <a:prstDash val="solid"/>
+                      <a:round/>
+                      <a:headEnd type="none" w="med" len="med"/>
+                      <a:tailEnd type="none" w="med" len="med"/>
+                    </a:lnR>
+                    <a:lnT w="9525" cap="flat" cmpd="sng" algn="ctr">
+                      <a:solidFill>
+                        <a:srgbClr val="DCD5C1"/>
+                      </a:solidFill>
+                      <a:prstDash val="solid"/>
+                      <a:round/>
+                      <a:headEnd type="none" w="med" len="med"/>
+                      <a:tailEnd type="none" w="med" len="med"/>
+                    </a:lnT>
+                    <a:lnB w="9525" cap="flat" cmpd="sng" algn="ctr">
+                      <a:solidFill>
+                        <a:srgbClr val="DCD5C1"/>
+                      </a:solidFill>
+                      <a:prstDash val="solid"/>
+                      <a:round/>
+                      <a:headEnd type="none" w="med" len="med"/>
+                      <a:tailEnd type="none" w="med" len="med"/>
+                    </a:lnB>
+                    <a:solidFill>
+                      <a:srgbClr val="F4F7F8"/>
+                    </a:solidFill>
+                  </a:tcPr>
+                </a:tc>
+              </a:tr>
+              <a:tr h="0">
+                <a:tc>
+                  <a:txBody>
+                    <a:bodyPr/>
+                    <a:lstStyle/>
+                    <a:p>
+                      <a:pPr indent="0" marL="0">
+                        <a:buNone/>
+                      </a:pPr>
+                      <a:r>
+                        <a:rPr lang="en-US" sz="1250" b="1" dirty="0">
+                          <a:solidFill>
+                            <a:srgbClr val="1F2A37"/>
+                          </a:solidFill>
+                          <a:latin typeface="Calibri" pitchFamily="34" charset="0"/>
+                          <a:ea typeface="Calibri" pitchFamily="34" charset="-122"/>
+                          <a:cs typeface="Calibri" pitchFamily="34" charset="-120"/>
+                        </a:rPr>
+                        <a:t>Habitação e saneamento</a:t>
+                      </a:r>
+                      <a:endParaRPr lang="en-US" sz="1250" dirty="0">
+                        <a:latin typeface="Calibri" charset="0"/>
+                        <a:ea typeface="Calibri" charset="0"/>
+                        <a:cs typeface="Calibri" charset="0"/>
+                      </a:endParaRPr>
+                    </a:p>
+                  </a:txBody>
+                  <a:tcPr marL="50800" marR="50800" marT="50800" marB="50800" anchor="ctr">
+                    <a:lnL w="9525" cap="flat" cmpd="sng" algn="ctr">
+                      <a:solidFill>
+                        <a:srgbClr val="DCD5C1"/>
+                      </a:solidFill>
+                      <a:prstDash val="solid"/>
+                      <a:round/>
+                      <a:headEnd type="none" w="med" len="med"/>
+                      <a:tailEnd type="none" w="med" len="med"/>
+                    </a:lnL>
+                    <a:lnR w="9525" cap="flat" cmpd="sng" algn="ctr">
+                      <a:solidFill>
+                        <a:srgbClr val="DCD5C1"/>
+                      </a:solidFill>
+                      <a:prstDash val="solid"/>
+                      <a:round/>
+                      <a:headEnd type="none" w="med" len="med"/>
+                      <a:tailEnd type="none" w="med" len="med"/>
+                    </a:lnR>
+                    <a:lnT w="9525" cap="flat" cmpd="sng" algn="ctr">
+                      <a:solidFill>
+                        <a:srgbClr val="DCD5C1"/>
+                      </a:solidFill>
+                      <a:prstDash val="solid"/>
+                      <a:round/>
+                      <a:headEnd type="none" w="med" len="med"/>
+                      <a:tailEnd type="none" w="med" len="med"/>
+                    </a:lnT>
+                    <a:lnB w="9525" cap="flat" cmpd="sng" algn="ctr">
+                      <a:solidFill>
+                        <a:srgbClr val="DCD5C1"/>
+                      </a:solidFill>
+                      <a:prstDash val="solid"/>
+                      <a:round/>
+                      <a:headEnd type="none" w="med" len="med"/>
+                      <a:tailEnd type="none" w="med" len="med"/>
+                    </a:lnB>
+                    <a:solidFill>
+                      <a:srgbClr val="FFFFFF"/>
+                    </a:solidFill>
+                  </a:tcPr>
+                </a:tc>
+                <a:tc>
+                  <a:txBody>
+                    <a:bodyPr/>
+                    <a:lstStyle/>
+                    <a:p>
+                      <a:pPr indent="0" marL="0">
+                        <a:buNone/>
+                      </a:pPr>
+                      <a:r>
+                        <a:rPr lang="en-US" sz="1250" dirty="0">
+                          <a:solidFill>
+                            <a:srgbClr val="1F2A37"/>
+                          </a:solidFill>
+                          <a:latin typeface="Calibri" pitchFamily="34" charset="0"/>
+                          <a:ea typeface="Calibri" pitchFamily="34" charset="-122"/>
+                          <a:cs typeface="Calibri" pitchFamily="34" charset="-120"/>
+                        </a:rPr>
+                        <a:t>% de domicílios com esgotamento adequado</a:t>
+                      </a:r>
+                      <a:endParaRPr lang="en-US" sz="1250" dirty="0">
+                        <a:latin typeface="Calibri" charset="0"/>
+                        <a:ea typeface="Calibri" charset="0"/>
+                        <a:cs typeface="Calibri" charset="0"/>
+                      </a:endParaRPr>
+                    </a:p>
+                  </a:txBody>
+                  <a:tcPr marL="50800" marR="50800" marT="50800" marB="50800" anchor="ctr">
+                    <a:lnL w="9525" cap="flat" cmpd="sng" algn="ctr">
+                      <a:solidFill>
+                        <a:srgbClr val="DCD5C1"/>
+                      </a:solidFill>
+                      <a:prstDash val="solid"/>
+                      <a:round/>
+                      <a:headEnd type="none" w="med" len="med"/>
+                      <a:tailEnd type="none" w="med" len="med"/>
+                    </a:lnL>
+                    <a:lnR w="9525" cap="flat" cmpd="sng" algn="ctr">
+                      <a:solidFill>
+                        <a:srgbClr val="DCD5C1"/>
+                      </a:solidFill>
+                      <a:prstDash val="solid"/>
+                      <a:round/>
+                      <a:headEnd type="none" w="med" len="med"/>
+                      <a:tailEnd type="none" w="med" len="med"/>
+                    </a:lnR>
+                    <a:lnT w="9525" cap="flat" cmpd="sng" algn="ctr">
+                      <a:solidFill>
+                        <a:srgbClr val="DCD5C1"/>
+                      </a:solidFill>
+                      <a:prstDash val="solid"/>
+                      <a:round/>
+                      <a:headEnd type="none" w="med" len="med"/>
+                      <a:tailEnd type="none" w="med" len="med"/>
+                    </a:lnT>
+                    <a:lnB w="9525" cap="flat" cmpd="sng" algn="ctr">
+                      <a:solidFill>
+                        <a:srgbClr val="DCD5C1"/>
+                      </a:solidFill>
+                      <a:prstDash val="solid"/>
+                      <a:round/>
+                      <a:headEnd type="none" w="med" len="med"/>
+                      <a:tailEnd type="none" w="med" len="med"/>
+                    </a:lnB>
+                    <a:solidFill>
+                      <a:srgbClr val="FFFFFF"/>
+                    </a:solidFill>
+                  </a:tcPr>
+                </a:tc>
+              </a:tr>
+              <a:tr h="0">
+                <a:tc>
+                  <a:txBody>
+                    <a:bodyPr/>
+                    <a:lstStyle/>
+                    <a:p>
+                      <a:pPr indent="0" marL="0">
+                        <a:buNone/>
+                      </a:pPr>
+                      <a:r>
+                        <a:rPr lang="en-US" sz="1250" b="1" dirty="0">
+                          <a:solidFill>
+                            <a:srgbClr val="1F2A37"/>
+                          </a:solidFill>
+                          <a:latin typeface="Calibri" pitchFamily="34" charset="0"/>
+                          <a:ea typeface="Calibri" pitchFamily="34" charset="-122"/>
+                          <a:cs typeface="Calibri" pitchFamily="34" charset="-120"/>
+                        </a:rPr>
+                        <a:t>Assistência social</a:t>
+                      </a:r>
+                      <a:endParaRPr lang="en-US" sz="1250" dirty="0">
+                        <a:latin typeface="Calibri" charset="0"/>
+                        <a:ea typeface="Calibri" charset="0"/>
+                        <a:cs typeface="Calibri" charset="0"/>
+                      </a:endParaRPr>
+                    </a:p>
+                  </a:txBody>
+                  <a:tcPr marL="50800" marR="50800" marT="50800" marB="50800" anchor="ctr">
+                    <a:lnL w="9525" cap="flat" cmpd="sng" algn="ctr">
+                      <a:solidFill>
+                        <a:srgbClr val="DCD5C1"/>
+                      </a:solidFill>
+                      <a:prstDash val="solid"/>
+                      <a:round/>
+                      <a:headEnd type="none" w="med" len="med"/>
+                      <a:tailEnd type="none" w="med" len="med"/>
+                    </a:lnL>
+                    <a:lnR w="9525" cap="flat" cmpd="sng" algn="ctr">
+                      <a:solidFill>
+                        <a:srgbClr val="DCD5C1"/>
+                      </a:solidFill>
+                      <a:prstDash val="solid"/>
+                      <a:round/>
+                      <a:headEnd type="none" w="med" len="med"/>
+                      <a:tailEnd type="none" w="med" len="med"/>
+                    </a:lnR>
+                    <a:lnT w="9525" cap="flat" cmpd="sng" algn="ctr">
+                      <a:solidFill>
+                        <a:srgbClr val="DCD5C1"/>
+                      </a:solidFill>
+                      <a:prstDash val="solid"/>
+                      <a:round/>
+                      <a:headEnd type="none" w="med" len="med"/>
+                      <a:tailEnd type="none" w="med" len="med"/>
+                    </a:lnT>
+                    <a:lnB w="9525" cap="flat" cmpd="sng" algn="ctr">
+                      <a:solidFill>
+                        <a:srgbClr val="DCD5C1"/>
+                      </a:solidFill>
+                      <a:prstDash val="solid"/>
+                      <a:round/>
+                      <a:headEnd type="none" w="med" len="med"/>
+                      <a:tailEnd type="none" w="med" len="med"/>
+                    </a:lnB>
+                    <a:solidFill>
+                      <a:srgbClr val="F4F7F8"/>
+                    </a:solidFill>
+                  </a:tcPr>
+                </a:tc>
+                <a:tc>
+                  <a:txBody>
+                    <a:bodyPr/>
+                    <a:lstStyle/>
+                    <a:p>
+                      <a:pPr indent="0" marL="0">
+                        <a:buNone/>
+                      </a:pPr>
+                      <a:r>
+                        <a:rPr lang="en-US" sz="1250" dirty="0">
+                          <a:solidFill>
+                            <a:srgbClr val="1F2A37"/>
+                          </a:solidFill>
+                          <a:latin typeface="Calibri" pitchFamily="34" charset="0"/>
+                          <a:ea typeface="Calibri" pitchFamily="34" charset="-122"/>
+                          <a:cs typeface="Calibri" pitchFamily="34" charset="-120"/>
+                        </a:rPr>
+                        <a:t>Famílias no CadÚnico por mil habitantes</a:t>
+                      </a:r>
+                      <a:endParaRPr lang="en-US" sz="1250" dirty="0">
+                        <a:latin typeface="Calibri" charset="0"/>
+                        <a:ea typeface="Calibri" charset="0"/>
+                        <a:cs typeface="Calibri" charset="0"/>
+                      </a:endParaRPr>
+                    </a:p>
+                  </a:txBody>
+                  <a:tcPr marL="50800" marR="50800" marT="50800" marB="50800" anchor="ctr">
+                    <a:lnL w="9525" cap="flat" cmpd="sng" algn="ctr">
+                      <a:solidFill>
+                        <a:srgbClr val="DCD5C1"/>
+                      </a:solidFill>
+                      <a:prstDash val="solid"/>
+                      <a:round/>
+                      <a:headEnd type="none" w="med" len="med"/>
+                      <a:tailEnd type="none" w="med" len="med"/>
+                    </a:lnL>
+                    <a:lnR w="9525" cap="flat" cmpd="sng" algn="ctr">
+                      <a:solidFill>
+                        <a:srgbClr val="DCD5C1"/>
+                      </a:solidFill>
+                      <a:prstDash val="solid"/>
+                      <a:round/>
+                      <a:headEnd type="none" w="med" len="med"/>
+                      <a:tailEnd type="none" w="med" len="med"/>
+                    </a:lnR>
+                    <a:lnT w="9525" cap="flat" cmpd="sng" algn="ctr">
+                      <a:solidFill>
+                        <a:srgbClr val="DCD5C1"/>
+                      </a:solidFill>
+                      <a:prstDash val="solid"/>
+                      <a:round/>
+                      <a:headEnd type="none" w="med" len="med"/>
+                      <a:tailEnd type="none" w="med" len="med"/>
+                    </a:lnT>
+                    <a:lnB w="9525" cap="flat" cmpd="sng" algn="ctr">
+                      <a:solidFill>
+                        <a:srgbClr val="DCD5C1"/>
+                      </a:solidFill>
+                      <a:prstDash val="solid"/>
+                      <a:round/>
+                      <a:headEnd type="none" w="med" len="med"/>
+                      <a:tailEnd type="none" w="med" len="med"/>
+                    </a:lnB>
+                    <a:solidFill>
+                      <a:srgbClr val="F4F7F8"/>
+                    </a:solidFill>
+                  </a:tcPr>
+                </a:tc>
+              </a:tr>
+              <a:tr h="0">
+                <a:tc>
+                  <a:txBody>
+                    <a:bodyPr/>
+                    <a:lstStyle/>
+                    <a:p>
+                      <a:pPr indent="0" marL="0">
+                        <a:buNone/>
+                      </a:pPr>
+                      <a:r>
+                        <a:rPr lang="en-US" sz="1250" b="1" dirty="0">
+                          <a:solidFill>
+                            <a:srgbClr val="1F2A37"/>
+                          </a:solidFill>
+                          <a:latin typeface="Calibri" pitchFamily="34" charset="0"/>
+                          <a:ea typeface="Calibri" pitchFamily="34" charset="-122"/>
+                          <a:cs typeface="Calibri" pitchFamily="34" charset="-120"/>
+                        </a:rPr>
+                        <a:t>Segurança</a:t>
+                      </a:r>
+                      <a:endParaRPr lang="en-US" sz="1250" dirty="0">
+                        <a:latin typeface="Calibri" charset="0"/>
+                        <a:ea typeface="Calibri" charset="0"/>
+                        <a:cs typeface="Calibri" charset="0"/>
+                      </a:endParaRPr>
+                    </a:p>
+                  </a:txBody>
+                  <a:tcPr marL="50800" marR="50800" marT="50800" marB="50800" anchor="ctr">
+                    <a:lnL w="9525" cap="flat" cmpd="sng" algn="ctr">
+                      <a:solidFill>
+                        <a:srgbClr val="DCD5C1"/>
+                      </a:solidFill>
+                      <a:prstDash val="solid"/>
+                      <a:round/>
+                      <a:headEnd type="none" w="med" len="med"/>
+                      <a:tailEnd type="none" w="med" len="med"/>
+                    </a:lnL>
+                    <a:lnR w="9525" cap="flat" cmpd="sng" algn="ctr">
+                      <a:solidFill>
+                        <a:srgbClr val="DCD5C1"/>
+                      </a:solidFill>
+                      <a:prstDash val="solid"/>
+                      <a:round/>
+                      <a:headEnd type="none" w="med" len="med"/>
+                      <a:tailEnd type="none" w="med" len="med"/>
+                    </a:lnR>
+                    <a:lnT w="9525" cap="flat" cmpd="sng" algn="ctr">
+                      <a:solidFill>
+                        <a:srgbClr val="DCD5C1"/>
+                      </a:solidFill>
+                      <a:prstDash val="solid"/>
+                      <a:round/>
+                      <a:headEnd type="none" w="med" len="med"/>
+                      <a:tailEnd type="none" w="med" len="med"/>
+                    </a:lnT>
+                    <a:lnB w="9525" cap="flat" cmpd="sng" algn="ctr">
+                      <a:solidFill>
+                        <a:srgbClr val="DCD5C1"/>
+                      </a:solidFill>
+                      <a:prstDash val="solid"/>
+                      <a:round/>
+                      <a:headEnd type="none" w="med" len="med"/>
+                      <a:tailEnd type="none" w="med" len="med"/>
+                    </a:lnB>
+                    <a:solidFill>
+                      <a:srgbClr val="FFFFFF"/>
+                    </a:solidFill>
+                  </a:tcPr>
+                </a:tc>
+                <a:tc>
+                  <a:txBody>
+                    <a:bodyPr/>
+                    <a:lstStyle/>
+                    <a:p>
+                      <a:pPr indent="0" marL="0">
+                        <a:buNone/>
+                      </a:pPr>
+                      <a:r>
+                        <a:rPr lang="en-US" sz="1250" dirty="0">
+                          <a:solidFill>
+                            <a:srgbClr val="1F2A37"/>
+                          </a:solidFill>
+                          <a:latin typeface="Calibri" pitchFamily="34" charset="0"/>
+                          <a:ea typeface="Calibri" pitchFamily="34" charset="-122"/>
+                          <a:cs typeface="Calibri" pitchFamily="34" charset="-120"/>
+                        </a:rPr>
+                        <a:t>Homicídios por 100 mil habitantes</a:t>
+                      </a:r>
+                      <a:endParaRPr lang="en-US" sz="1250" dirty="0">
+                        <a:latin typeface="Calibri" charset="0"/>
+                        <a:ea typeface="Calibri" charset="0"/>
+                        <a:cs typeface="Calibri" charset="0"/>
+                      </a:endParaRPr>
+                    </a:p>
+                  </a:txBody>
+                  <a:tcPr marL="50800" marR="50800" marT="50800" marB="50800" anchor="ctr">
+                    <a:lnL w="9525" cap="flat" cmpd="sng" algn="ctr">
+                      <a:solidFill>
+                        <a:srgbClr val="DCD5C1"/>
+                      </a:solidFill>
+                      <a:prstDash val="solid"/>
+                      <a:round/>
+                      <a:headEnd type="none" w="med" len="med"/>
+                      <a:tailEnd type="none" w="med" len="med"/>
+                    </a:lnL>
+                    <a:lnR w="9525" cap="flat" cmpd="sng" algn="ctr">
+                      <a:solidFill>
+                        <a:srgbClr val="DCD5C1"/>
+                      </a:solidFill>
+                      <a:prstDash val="solid"/>
+                      <a:round/>
+                      <a:headEnd type="none" w="med" len="med"/>
+                      <a:tailEnd type="none" w="med" len="med"/>
+                    </a:lnR>
+                    <a:lnT w="9525" cap="flat" cmpd="sng" algn="ctr">
+                      <a:solidFill>
+                        <a:srgbClr val="DCD5C1"/>
+                      </a:solidFill>
+                      <a:prstDash val="solid"/>
+                      <a:round/>
+                      <a:headEnd type="none" w="med" len="med"/>
+                      <a:tailEnd type="none" w="med" len="med"/>
+                    </a:lnT>
+                    <a:lnB w="9525" cap="flat" cmpd="sng" algn="ctr">
+                      <a:solidFill>
+                        <a:srgbClr val="DCD5C1"/>
+                      </a:solidFill>
+                      <a:prstDash val="solid"/>
+                      <a:round/>
+                      <a:headEnd type="none" w="med" len="med"/>
+                      <a:tailEnd type="none" w="med" len="med"/>
+                    </a:lnB>
+                    <a:solidFill>
+                      <a:srgbClr val="FFFFFF"/>
+                    </a:solidFill>
+                  </a:tcPr>
+                </a:tc>
+              </a:tr>
+              <a:tr h="0">
+                <a:tc>
+                  <a:txBody>
+                    <a:bodyPr/>
+                    <a:lstStyle/>
+                    <a:p>
+                      <a:pPr indent="0" marL="0">
+                        <a:buNone/>
+                      </a:pPr>
+                      <a:r>
+                        <a:rPr lang="en-US" sz="1250" b="1" dirty="0">
+                          <a:solidFill>
+                            <a:srgbClr val="1F2A37"/>
+                          </a:solidFill>
+                          <a:latin typeface="Calibri" pitchFamily="34" charset="0"/>
+                          <a:ea typeface="Calibri" pitchFamily="34" charset="-122"/>
+                          <a:cs typeface="Calibri" pitchFamily="34" charset="-120"/>
+                        </a:rPr>
+                        <a:t>Finanças públicas</a:t>
+                      </a:r>
+                      <a:endParaRPr lang="en-US" sz="1250" dirty="0">
+                        <a:latin typeface="Calibri" charset="0"/>
+                        <a:ea typeface="Calibri" charset="0"/>
+                        <a:cs typeface="Calibri" charset="0"/>
+                      </a:endParaRPr>
+                    </a:p>
+                  </a:txBody>
+                  <a:tcPr marL="50800" marR="50800" marT="50800" marB="50800" anchor="ctr">
+                    <a:lnL w="9525" cap="flat" cmpd="sng" algn="ctr">
+                      <a:solidFill>
+                        <a:srgbClr val="DCD5C1"/>
+                      </a:solidFill>
+                      <a:prstDash val="solid"/>
+                      <a:round/>
+                      <a:headEnd type="none" w="med" len="med"/>
+                      <a:tailEnd type="none" w="med" len="med"/>
+                    </a:lnL>
+                    <a:lnR w="9525" cap="flat" cmpd="sng" algn="ctr">
+                      <a:solidFill>
+                        <a:srgbClr val="DCD5C1"/>
+                      </a:solidFill>
+                      <a:prstDash val="solid"/>
+                      <a:round/>
+                      <a:headEnd type="none" w="med" len="med"/>
+                      <a:tailEnd type="none" w="med" len="med"/>
+                    </a:lnR>
+                    <a:lnT w="9525" cap="flat" cmpd="sng" algn="ctr">
+                      <a:solidFill>
+                        <a:srgbClr val="DCD5C1"/>
+                      </a:solidFill>
+                      <a:prstDash val="solid"/>
+                      <a:round/>
+                      <a:headEnd type="none" w="med" len="med"/>
+                      <a:tailEnd type="none" w="med" len="med"/>
+                    </a:lnT>
+                    <a:lnB w="9525" cap="flat" cmpd="sng" algn="ctr">
+                      <a:solidFill>
+                        <a:srgbClr val="DCD5C1"/>
+                      </a:solidFill>
+                      <a:prstDash val="solid"/>
+                      <a:round/>
+                      <a:headEnd type="none" w="med" len="med"/>
+                      <a:tailEnd type="none" w="med" len="med"/>
+                    </a:lnB>
+                    <a:solidFill>
+                      <a:srgbClr val="F4F7F8"/>
+                    </a:solidFill>
+                  </a:tcPr>
+                </a:tc>
+                <a:tc>
+                  <a:txBody>
+                    <a:bodyPr/>
+                    <a:lstStyle/>
+                    <a:p>
+                      <a:pPr indent="0" marL="0">
+                        <a:buNone/>
+                      </a:pPr>
+                      <a:r>
+                        <a:rPr lang="en-US" sz="1250" dirty="0">
+                          <a:solidFill>
+                            <a:srgbClr val="1F2A37"/>
+                          </a:solidFill>
+                          <a:latin typeface="Calibri" pitchFamily="34" charset="0"/>
+                          <a:ea typeface="Calibri" pitchFamily="34" charset="-122"/>
+                          <a:cs typeface="Calibri" pitchFamily="34" charset="-120"/>
+                        </a:rPr>
+                        <a:t>Receita própria ÷ receita total; gasto com pessoal ÷ RCL</a:t>
+                      </a:r>
+                      <a:endParaRPr lang="en-US" sz="1250" dirty="0">
+                        <a:latin typeface="Calibri" charset="0"/>
+                        <a:ea typeface="Calibri" charset="0"/>
+                        <a:cs typeface="Calibri" charset="0"/>
+                      </a:endParaRPr>
+                    </a:p>
+                  </a:txBody>
+                  <a:tcPr marL="50800" marR="50800" marT="50800" marB="50800" anchor="ctr">
+                    <a:lnL w="9525" cap="flat" cmpd="sng" algn="ctr">
+                      <a:solidFill>
+                        <a:srgbClr val="DCD5C1"/>
+                      </a:solidFill>
+                      <a:prstDash val="solid"/>
+                      <a:round/>
+                      <a:headEnd type="none" w="med" len="med"/>
+                      <a:tailEnd type="none" w="med" len="med"/>
+                    </a:lnL>
+                    <a:lnR w="9525" cap="flat" cmpd="sng" algn="ctr">
+                      <a:solidFill>
+                        <a:srgbClr val="DCD5C1"/>
+                      </a:solidFill>
+                      <a:prstDash val="solid"/>
+                      <a:round/>
+                      <a:headEnd type="none" w="med" len="med"/>
+                      <a:tailEnd type="none" w="med" len="med"/>
+                    </a:lnR>
+                    <a:lnT w="9525" cap="flat" cmpd="sng" algn="ctr">
+                      <a:solidFill>
+                        <a:srgbClr val="DCD5C1"/>
+                      </a:solidFill>
+                      <a:prstDash val="solid"/>
+                      <a:round/>
+                      <a:headEnd type="none" w="med" len="med"/>
+                      <a:tailEnd type="none" w="med" len="med"/>
+                    </a:lnT>
+                    <a:lnB w="9525" cap="flat" cmpd="sng" algn="ctr">
+                      <a:solidFill>
+                        <a:srgbClr val="DCD5C1"/>
+                      </a:solidFill>
+                      <a:prstDash val="solid"/>
+                      <a:round/>
+                      <a:headEnd type="none" w="med" len="med"/>
+                      <a:tailEnd type="none" w="med" len="med"/>
+                    </a:lnB>
+                    <a:solidFill>
+                      <a:srgbClr val="F4F7F8"/>
+                    </a:solidFill>
+                  </a:tcPr>
+                </a:tc>
+              </a:tr>
+            </a:tbl>
+          </a:graphicData>
+        </a:graphic>
+      </p:graphicFrame>
+      <p:sp>
+        <p:nvSpPr>
+          <p:cNvPr id="4" name="Text 1"/>
           <p:cNvSpPr txBox="1"/>
           <p:nvPr/>
         </p:nvSpPr>
@@ -21306,7 +23072,7 @@
                 <a:ea typeface="Calibri" pitchFamily="34" charset="-122"/>
                 <a:cs typeface="Calibri" pitchFamily="34" charset="-120"/>
               </a:rPr>
-              <a:t>Indicadores Socioeconômicos · Unidade 2</a:t>
+              <a:t>Indicadores Socioeconômicos · Unidade 2 · Tópico 4 do sumário</a:t>
             </a:r>
             <a:endParaRPr lang="en-US" sz="950" dirty="0"/>
           </a:p>
